--- a/deliverables/Bank_Churn_Analysis.pptx
+++ b/deliverables/Bank_Churn_Analysis.pptx
@@ -5,21 +5,21 @@
     <p:sldMasterId id="2147483648" r:id="rId1"/>
   </p:sldMasterIdLst>
   <p:sldIdLst>
-    <p:sldId id="256" r:id="rId7"/>
-    <p:sldId id="257" r:id="rId8"/>
-    <p:sldId id="258" r:id="rId9"/>
-    <p:sldId id="259" r:id="rId10"/>
-    <p:sldId id="260" r:id="rId11"/>
-    <p:sldId id="261" r:id="rId12"/>
-    <p:sldId id="262" r:id="rId13"/>
-    <p:sldId id="263" r:id="rId14"/>
-    <p:sldId id="264" r:id="rId15"/>
-    <p:sldId id="265" r:id="rId16"/>
-    <p:sldId id="266" r:id="rId17"/>
-    <p:sldId id="267" r:id="rId18"/>
-    <p:sldId id="268" r:id="rId19"/>
+    <p:sldId id="256" r:id="rId2"/>
+    <p:sldId id="257" r:id="rId3"/>
+    <p:sldId id="258" r:id="rId4"/>
+    <p:sldId id="259" r:id="rId5"/>
+    <p:sldId id="260" r:id="rId6"/>
+    <p:sldId id="261" r:id="rId7"/>
+    <p:sldId id="262" r:id="rId8"/>
+    <p:sldId id="263" r:id="rId9"/>
+    <p:sldId id="264" r:id="rId10"/>
+    <p:sldId id="265" r:id="rId11"/>
+    <p:sldId id="266" r:id="rId12"/>
+    <p:sldId id="267" r:id="rId13"/>
+    <p:sldId id="268" r:id="rId14"/>
   </p:sldIdLst>
-  <p:sldSz cx="12191695" cy="6858000" type="screen4x3"/>
+  <p:sldSz cx="12192000" cy="6858000"/>
   <p:notesSz cx="6858000" cy="9144000"/>
   <p:defaultTextStyle>
     <a:defPPr>
@@ -116,6 +116,22 @@
       </a:defRPr>
     </a:lvl9pPr>
   </p:defaultTextStyle>
+  <p:extLst>
+    <p:ext uri="{EFAFB233-063F-42B5-8137-9DF3F51BA10A}">
+      <p15:sldGuideLst xmlns:p15="http://schemas.microsoft.com/office/powerpoint/2012/main">
+        <p15:guide id="1" orient="horz" pos="2160">
+          <p15:clr>
+            <a:srgbClr val="A4A3A4"/>
+          </p15:clr>
+        </p15:guide>
+        <p15:guide id="2" pos="2880">
+          <p15:clr>
+            <a:srgbClr val="A4A3A4"/>
+          </p15:clr>
+        </p15:guide>
+      </p15:sldGuideLst>
+    </p:ext>
+  </p:extLst>
 </p:presentation>
 </file>
 
@@ -157,10 +173,9 @@
           <a:lstStyle/>
           <a:p>
             <a:r>
-              <a:rPr lang="en-US" smtClean="0"/>
+              <a:rPr lang="en-US"/>
               <a:t>Click to edit Master title style</a:t>
             </a:r>
-            <a:endParaRPr lang="en-US"/>
           </a:p>
         </p:txBody>
       </p:sp>
@@ -276,10 +291,9 @@
           </a:lstStyle>
           <a:p>
             <a:r>
-              <a:rPr lang="en-US" smtClean="0"/>
+              <a:rPr lang="en-US"/>
               <a:t>Click to edit Master subtitle style</a:t>
             </a:r>
-            <a:endParaRPr lang="en-US"/>
           </a:p>
         </p:txBody>
       </p:sp>
@@ -300,7 +314,7 @@
           <a:p>
             <a:fld id="{5BCAD085-E8A6-8845-BD4E-CB4CCA059FC4}" type="datetimeFigureOut">
               <a:rPr lang="en-US" smtClean="0"/>
-              <a:t>1/27/13</a:t>
+              <a:t>6/24/26</a:t>
             </a:fld>
             <a:endParaRPr lang="en-US"/>
           </a:p>
@@ -394,10 +408,9 @@
           <a:lstStyle/>
           <a:p>
             <a:r>
-              <a:rPr lang="en-US" smtClean="0"/>
+              <a:rPr lang="en-US"/>
               <a:t>Click to edit Master title style</a:t>
             </a:r>
-            <a:endParaRPr lang="en-US"/>
           </a:p>
         </p:txBody>
       </p:sp>
@@ -418,38 +431,37 @@
           <a:p>
             <a:pPr lvl="0"/>
             <a:r>
-              <a:rPr lang="en-US" smtClean="0"/>
+              <a:rPr lang="en-US"/>
               <a:t>Click to edit Master text styles</a:t>
             </a:r>
           </a:p>
           <a:p>
             <a:pPr lvl="1"/>
             <a:r>
-              <a:rPr lang="en-US" smtClean="0"/>
+              <a:rPr lang="en-US"/>
               <a:t>Second level</a:t>
             </a:r>
           </a:p>
           <a:p>
             <a:pPr lvl="2"/>
             <a:r>
-              <a:rPr lang="en-US" smtClean="0"/>
+              <a:rPr lang="en-US"/>
               <a:t>Third level</a:t>
             </a:r>
           </a:p>
           <a:p>
             <a:pPr lvl="3"/>
             <a:r>
-              <a:rPr lang="en-US" smtClean="0"/>
+              <a:rPr lang="en-US"/>
               <a:t>Fourth level</a:t>
             </a:r>
           </a:p>
           <a:p>
             <a:pPr lvl="4"/>
             <a:r>
-              <a:rPr lang="en-US" smtClean="0"/>
+              <a:rPr lang="en-US"/>
               <a:t>Fifth level</a:t>
             </a:r>
-            <a:endParaRPr lang="en-US"/>
           </a:p>
         </p:txBody>
       </p:sp>
@@ -470,7 +482,7 @@
           <a:p>
             <a:fld id="{5BCAD085-E8A6-8845-BD4E-CB4CCA059FC4}" type="datetimeFigureOut">
               <a:rPr lang="en-US" smtClean="0"/>
-              <a:t>1/27/13</a:t>
+              <a:t>6/24/26</a:t>
             </a:fld>
             <a:endParaRPr lang="en-US"/>
           </a:p>
@@ -569,10 +581,9 @@
           <a:lstStyle/>
           <a:p>
             <a:r>
-              <a:rPr lang="en-US" smtClean="0"/>
+              <a:rPr lang="en-US"/>
               <a:t>Click to edit Master title style</a:t>
             </a:r>
-            <a:endParaRPr lang="en-US"/>
           </a:p>
         </p:txBody>
       </p:sp>
@@ -598,38 +609,37 @@
           <a:p>
             <a:pPr lvl="0"/>
             <a:r>
-              <a:rPr lang="en-US" smtClean="0"/>
+              <a:rPr lang="en-US"/>
               <a:t>Click to edit Master text styles</a:t>
             </a:r>
           </a:p>
           <a:p>
             <a:pPr lvl="1"/>
             <a:r>
-              <a:rPr lang="en-US" smtClean="0"/>
+              <a:rPr lang="en-US"/>
               <a:t>Second level</a:t>
             </a:r>
           </a:p>
           <a:p>
             <a:pPr lvl="2"/>
             <a:r>
-              <a:rPr lang="en-US" smtClean="0"/>
+              <a:rPr lang="en-US"/>
               <a:t>Third level</a:t>
             </a:r>
           </a:p>
           <a:p>
             <a:pPr lvl="3"/>
             <a:r>
-              <a:rPr lang="en-US" smtClean="0"/>
+              <a:rPr lang="en-US"/>
               <a:t>Fourth level</a:t>
             </a:r>
           </a:p>
           <a:p>
             <a:pPr lvl="4"/>
             <a:r>
-              <a:rPr lang="en-US" smtClean="0"/>
+              <a:rPr lang="en-US"/>
               <a:t>Fifth level</a:t>
             </a:r>
-            <a:endParaRPr lang="en-US"/>
           </a:p>
         </p:txBody>
       </p:sp>
@@ -650,7 +660,7 @@
           <a:p>
             <a:fld id="{5BCAD085-E8A6-8845-BD4E-CB4CCA059FC4}" type="datetimeFigureOut">
               <a:rPr lang="en-US" smtClean="0"/>
-              <a:t>1/27/13</a:t>
+              <a:t>6/24/26</a:t>
             </a:fld>
             <a:endParaRPr lang="en-US"/>
           </a:p>
@@ -744,10 +754,9 @@
           <a:lstStyle/>
           <a:p>
             <a:r>
-              <a:rPr lang="en-US" smtClean="0"/>
+              <a:rPr lang="en-US"/>
               <a:t>Click to edit Master title style</a:t>
             </a:r>
-            <a:endParaRPr lang="en-US"/>
           </a:p>
         </p:txBody>
       </p:sp>
@@ -768,38 +777,37 @@
           <a:p>
             <a:pPr lvl="0"/>
             <a:r>
-              <a:rPr lang="en-US" smtClean="0"/>
+              <a:rPr lang="en-US"/>
               <a:t>Click to edit Master text styles</a:t>
             </a:r>
           </a:p>
           <a:p>
             <a:pPr lvl="1"/>
             <a:r>
-              <a:rPr lang="en-US" smtClean="0"/>
+              <a:rPr lang="en-US"/>
               <a:t>Second level</a:t>
             </a:r>
           </a:p>
           <a:p>
             <a:pPr lvl="2"/>
             <a:r>
-              <a:rPr lang="en-US" smtClean="0"/>
+              <a:rPr lang="en-US"/>
               <a:t>Third level</a:t>
             </a:r>
           </a:p>
           <a:p>
             <a:pPr lvl="3"/>
             <a:r>
-              <a:rPr lang="en-US" smtClean="0"/>
+              <a:rPr lang="en-US"/>
               <a:t>Fourth level</a:t>
             </a:r>
           </a:p>
           <a:p>
             <a:pPr lvl="4"/>
             <a:r>
-              <a:rPr lang="en-US" smtClean="0"/>
+              <a:rPr lang="en-US"/>
               <a:t>Fifth level</a:t>
             </a:r>
-            <a:endParaRPr lang="en-US"/>
           </a:p>
         </p:txBody>
       </p:sp>
@@ -820,7 +828,7 @@
           <a:p>
             <a:fld id="{5BCAD085-E8A6-8845-BD4E-CB4CCA059FC4}" type="datetimeFigureOut">
               <a:rPr lang="en-US" smtClean="0"/>
-              <a:t>1/27/13</a:t>
+              <a:t>6/24/26</a:t>
             </a:fld>
             <a:endParaRPr lang="en-US"/>
           </a:p>
@@ -923,10 +931,9 @@
           </a:lstStyle>
           <a:p>
             <a:r>
-              <a:rPr lang="en-US" smtClean="0"/>
+              <a:rPr lang="en-US"/>
               <a:t>Click to edit Master title style</a:t>
             </a:r>
-            <a:endParaRPr lang="en-US"/>
           </a:p>
         </p:txBody>
       </p:sp>
@@ -1043,7 +1050,7 @@
           <a:p>
             <a:pPr lvl="0"/>
             <a:r>
-              <a:rPr lang="en-US" smtClean="0"/>
+              <a:rPr lang="en-US"/>
               <a:t>Click to edit Master text styles</a:t>
             </a:r>
           </a:p>
@@ -1066,7 +1073,7 @@
           <a:p>
             <a:fld id="{5BCAD085-E8A6-8845-BD4E-CB4CCA059FC4}" type="datetimeFigureOut">
               <a:rPr lang="en-US" smtClean="0"/>
-              <a:t>1/27/13</a:t>
+              <a:t>6/24/26</a:t>
             </a:fld>
             <a:endParaRPr lang="en-US"/>
           </a:p>
@@ -1160,10 +1167,9 @@
           <a:lstStyle/>
           <a:p>
             <a:r>
-              <a:rPr lang="en-US" smtClean="0"/>
+              <a:rPr lang="en-US"/>
               <a:t>Click to edit Master title style</a:t>
             </a:r>
-            <a:endParaRPr lang="en-US"/>
           </a:p>
         </p:txBody>
       </p:sp>
@@ -1217,38 +1223,37 @@
           <a:p>
             <a:pPr lvl="0"/>
             <a:r>
-              <a:rPr lang="en-US" smtClean="0"/>
+              <a:rPr lang="en-US"/>
               <a:t>Click to edit Master text styles</a:t>
             </a:r>
           </a:p>
           <a:p>
             <a:pPr lvl="1"/>
             <a:r>
-              <a:rPr lang="en-US" smtClean="0"/>
+              <a:rPr lang="en-US"/>
               <a:t>Second level</a:t>
             </a:r>
           </a:p>
           <a:p>
             <a:pPr lvl="2"/>
             <a:r>
-              <a:rPr lang="en-US" smtClean="0"/>
+              <a:rPr lang="en-US"/>
               <a:t>Third level</a:t>
             </a:r>
           </a:p>
           <a:p>
             <a:pPr lvl="3"/>
             <a:r>
-              <a:rPr lang="en-US" smtClean="0"/>
+              <a:rPr lang="en-US"/>
               <a:t>Fourth level</a:t>
             </a:r>
           </a:p>
           <a:p>
             <a:pPr lvl="4"/>
             <a:r>
-              <a:rPr lang="en-US" smtClean="0"/>
+              <a:rPr lang="en-US"/>
               <a:t>Fifth level</a:t>
             </a:r>
-            <a:endParaRPr lang="en-US"/>
           </a:p>
         </p:txBody>
       </p:sp>
@@ -1302,38 +1307,37 @@
           <a:p>
             <a:pPr lvl="0"/>
             <a:r>
-              <a:rPr lang="en-US" smtClean="0"/>
+              <a:rPr lang="en-US"/>
               <a:t>Click to edit Master text styles</a:t>
             </a:r>
           </a:p>
           <a:p>
             <a:pPr lvl="1"/>
             <a:r>
-              <a:rPr lang="en-US" smtClean="0"/>
+              <a:rPr lang="en-US"/>
               <a:t>Second level</a:t>
             </a:r>
           </a:p>
           <a:p>
             <a:pPr lvl="2"/>
             <a:r>
-              <a:rPr lang="en-US" smtClean="0"/>
+              <a:rPr lang="en-US"/>
               <a:t>Third level</a:t>
             </a:r>
           </a:p>
           <a:p>
             <a:pPr lvl="3"/>
             <a:r>
-              <a:rPr lang="en-US" smtClean="0"/>
+              <a:rPr lang="en-US"/>
               <a:t>Fourth level</a:t>
             </a:r>
           </a:p>
           <a:p>
             <a:pPr lvl="4"/>
             <a:r>
-              <a:rPr lang="en-US" smtClean="0"/>
+              <a:rPr lang="en-US"/>
               <a:t>Fifth level</a:t>
             </a:r>
-            <a:endParaRPr lang="en-US"/>
           </a:p>
         </p:txBody>
       </p:sp>
@@ -1354,7 +1358,7 @@
           <a:p>
             <a:fld id="{5BCAD085-E8A6-8845-BD4E-CB4CCA059FC4}" type="datetimeFigureOut">
               <a:rPr lang="en-US" smtClean="0"/>
-              <a:t>1/27/13</a:t>
+              <a:t>6/24/26</a:t>
             </a:fld>
             <a:endParaRPr lang="en-US"/>
           </a:p>
@@ -1452,10 +1456,9 @@
           </a:lstStyle>
           <a:p>
             <a:r>
-              <a:rPr lang="en-US" smtClean="0"/>
+              <a:rPr lang="en-US"/>
               <a:t>Click to edit Master title style</a:t>
             </a:r>
-            <a:endParaRPr lang="en-US"/>
           </a:p>
         </p:txBody>
       </p:sp>
@@ -1518,7 +1521,7 @@
           <a:p>
             <a:pPr lvl="0"/>
             <a:r>
-              <a:rPr lang="en-US" smtClean="0"/>
+              <a:rPr lang="en-US"/>
               <a:t>Click to edit Master text styles</a:t>
             </a:r>
           </a:p>
@@ -1574,38 +1577,37 @@
           <a:p>
             <a:pPr lvl="0"/>
             <a:r>
-              <a:rPr lang="en-US" smtClean="0"/>
+              <a:rPr lang="en-US"/>
               <a:t>Click to edit Master text styles</a:t>
             </a:r>
           </a:p>
           <a:p>
             <a:pPr lvl="1"/>
             <a:r>
-              <a:rPr lang="en-US" smtClean="0"/>
+              <a:rPr lang="en-US"/>
               <a:t>Second level</a:t>
             </a:r>
           </a:p>
           <a:p>
             <a:pPr lvl="2"/>
             <a:r>
-              <a:rPr lang="en-US" smtClean="0"/>
+              <a:rPr lang="en-US"/>
               <a:t>Third level</a:t>
             </a:r>
           </a:p>
           <a:p>
             <a:pPr lvl="3"/>
             <a:r>
-              <a:rPr lang="en-US" smtClean="0"/>
+              <a:rPr lang="en-US"/>
               <a:t>Fourth level</a:t>
             </a:r>
           </a:p>
           <a:p>
             <a:pPr lvl="4"/>
             <a:r>
-              <a:rPr lang="en-US" smtClean="0"/>
+              <a:rPr lang="en-US"/>
               <a:t>Fifth level</a:t>
             </a:r>
-            <a:endParaRPr lang="en-US"/>
           </a:p>
         </p:txBody>
       </p:sp>
@@ -1668,7 +1670,7 @@
           <a:p>
             <a:pPr lvl="0"/>
             <a:r>
-              <a:rPr lang="en-US" smtClean="0"/>
+              <a:rPr lang="en-US"/>
               <a:t>Click to edit Master text styles</a:t>
             </a:r>
           </a:p>
@@ -1724,38 +1726,37 @@
           <a:p>
             <a:pPr lvl="0"/>
             <a:r>
-              <a:rPr lang="en-US" smtClean="0"/>
+              <a:rPr lang="en-US"/>
               <a:t>Click to edit Master text styles</a:t>
             </a:r>
           </a:p>
           <a:p>
             <a:pPr lvl="1"/>
             <a:r>
-              <a:rPr lang="en-US" smtClean="0"/>
+              <a:rPr lang="en-US"/>
               <a:t>Second level</a:t>
             </a:r>
           </a:p>
           <a:p>
             <a:pPr lvl="2"/>
             <a:r>
-              <a:rPr lang="en-US" smtClean="0"/>
+              <a:rPr lang="en-US"/>
               <a:t>Third level</a:t>
             </a:r>
           </a:p>
           <a:p>
             <a:pPr lvl="3"/>
             <a:r>
-              <a:rPr lang="en-US" smtClean="0"/>
+              <a:rPr lang="en-US"/>
               <a:t>Fourth level</a:t>
             </a:r>
           </a:p>
           <a:p>
             <a:pPr lvl="4"/>
             <a:r>
-              <a:rPr lang="en-US" smtClean="0"/>
+              <a:rPr lang="en-US"/>
               <a:t>Fifth level</a:t>
             </a:r>
-            <a:endParaRPr lang="en-US"/>
           </a:p>
         </p:txBody>
       </p:sp>
@@ -1776,7 +1777,7 @@
           <a:p>
             <a:fld id="{5BCAD085-E8A6-8845-BD4E-CB4CCA059FC4}" type="datetimeFigureOut">
               <a:rPr lang="en-US" smtClean="0"/>
-              <a:t>1/27/13</a:t>
+              <a:t>6/24/26</a:t>
             </a:fld>
             <a:endParaRPr lang="en-US"/>
           </a:p>
@@ -1870,10 +1871,9 @@
           <a:lstStyle/>
           <a:p>
             <a:r>
-              <a:rPr lang="en-US" smtClean="0"/>
+              <a:rPr lang="en-US"/>
               <a:t>Click to edit Master title style</a:t>
             </a:r>
-            <a:endParaRPr lang="en-US"/>
           </a:p>
         </p:txBody>
       </p:sp>
@@ -1894,7 +1894,7 @@
           <a:p>
             <a:fld id="{5BCAD085-E8A6-8845-BD4E-CB4CCA059FC4}" type="datetimeFigureOut">
               <a:rPr lang="en-US" smtClean="0"/>
-              <a:t>1/27/13</a:t>
+              <a:t>6/24/26</a:t>
             </a:fld>
             <a:endParaRPr lang="en-US"/>
           </a:p>
@@ -1989,7 +1989,7 @@
           <a:p>
             <a:fld id="{5BCAD085-E8A6-8845-BD4E-CB4CCA059FC4}" type="datetimeFigureOut">
               <a:rPr lang="en-US" smtClean="0"/>
-              <a:t>1/27/13</a:t>
+              <a:t>6/24/26</a:t>
             </a:fld>
             <a:endParaRPr lang="en-US"/>
           </a:p>
@@ -2092,10 +2092,9 @@
           </a:lstStyle>
           <a:p>
             <a:r>
-              <a:rPr lang="en-US" smtClean="0"/>
+              <a:rPr lang="en-US"/>
               <a:t>Click to edit Master title style</a:t>
             </a:r>
-            <a:endParaRPr lang="en-US"/>
           </a:p>
         </p:txBody>
       </p:sp>
@@ -2149,38 +2148,37 @@
           <a:p>
             <a:pPr lvl="0"/>
             <a:r>
-              <a:rPr lang="en-US" smtClean="0"/>
+              <a:rPr lang="en-US"/>
               <a:t>Click to edit Master text styles</a:t>
             </a:r>
           </a:p>
           <a:p>
             <a:pPr lvl="1"/>
             <a:r>
-              <a:rPr lang="en-US" smtClean="0"/>
+              <a:rPr lang="en-US"/>
               <a:t>Second level</a:t>
             </a:r>
           </a:p>
           <a:p>
             <a:pPr lvl="2"/>
             <a:r>
-              <a:rPr lang="en-US" smtClean="0"/>
+              <a:rPr lang="en-US"/>
               <a:t>Third level</a:t>
             </a:r>
           </a:p>
           <a:p>
             <a:pPr lvl="3"/>
             <a:r>
-              <a:rPr lang="en-US" smtClean="0"/>
+              <a:rPr lang="en-US"/>
               <a:t>Fourth level</a:t>
             </a:r>
           </a:p>
           <a:p>
             <a:pPr lvl="4"/>
             <a:r>
-              <a:rPr lang="en-US" smtClean="0"/>
+              <a:rPr lang="en-US"/>
               <a:t>Fifth level</a:t>
             </a:r>
-            <a:endParaRPr lang="en-US"/>
           </a:p>
         </p:txBody>
       </p:sp>
@@ -2243,7 +2241,7 @@
           <a:p>
             <a:pPr lvl="0"/>
             <a:r>
-              <a:rPr lang="en-US" smtClean="0"/>
+              <a:rPr lang="en-US"/>
               <a:t>Click to edit Master text styles</a:t>
             </a:r>
           </a:p>
@@ -2266,7 +2264,7 @@
           <a:p>
             <a:fld id="{5BCAD085-E8A6-8845-BD4E-CB4CCA059FC4}" type="datetimeFigureOut">
               <a:rPr lang="en-US" smtClean="0"/>
-              <a:t>1/27/13</a:t>
+              <a:t>6/24/26</a:t>
             </a:fld>
             <a:endParaRPr lang="en-US"/>
           </a:p>
@@ -2369,10 +2367,9 @@
           </a:lstStyle>
           <a:p>
             <a:r>
-              <a:rPr lang="en-US" smtClean="0"/>
+              <a:rPr lang="en-US"/>
               <a:t>Click to edit Master title style</a:t>
             </a:r>
-            <a:endParaRPr lang="en-US"/>
           </a:p>
         </p:txBody>
       </p:sp>
@@ -2496,7 +2493,7 @@
           <a:p>
             <a:pPr lvl="0"/>
             <a:r>
-              <a:rPr lang="en-US" smtClean="0"/>
+              <a:rPr lang="en-US"/>
               <a:t>Click to edit Master text styles</a:t>
             </a:r>
           </a:p>
@@ -2519,7 +2516,7 @@
           <a:p>
             <a:fld id="{5BCAD085-E8A6-8845-BD4E-CB4CCA059FC4}" type="datetimeFigureOut">
               <a:rPr lang="en-US" smtClean="0"/>
-              <a:t>1/27/13</a:t>
+              <a:t>6/24/26</a:t>
             </a:fld>
             <a:endParaRPr lang="en-US"/>
           </a:p>
@@ -2628,10 +2625,9 @@
           <a:lstStyle/>
           <a:p>
             <a:r>
-              <a:rPr lang="en-US" smtClean="0"/>
+              <a:rPr lang="en-US"/>
               <a:t>Click to edit Master title style</a:t>
             </a:r>
-            <a:endParaRPr lang="en-US"/>
           </a:p>
         </p:txBody>
       </p:sp>
@@ -2662,38 +2658,37 @@
           <a:p>
             <a:pPr lvl="0"/>
             <a:r>
-              <a:rPr lang="en-US" smtClean="0"/>
+              <a:rPr lang="en-US"/>
               <a:t>Click to edit Master text styles</a:t>
             </a:r>
           </a:p>
           <a:p>
             <a:pPr lvl="1"/>
             <a:r>
-              <a:rPr lang="en-US" smtClean="0"/>
+              <a:rPr lang="en-US"/>
               <a:t>Second level</a:t>
             </a:r>
           </a:p>
           <a:p>
             <a:pPr lvl="2"/>
             <a:r>
-              <a:rPr lang="en-US" smtClean="0"/>
+              <a:rPr lang="en-US"/>
               <a:t>Third level</a:t>
             </a:r>
           </a:p>
           <a:p>
             <a:pPr lvl="3"/>
             <a:r>
-              <a:rPr lang="en-US" smtClean="0"/>
+              <a:rPr lang="en-US"/>
               <a:t>Fourth level</a:t>
             </a:r>
           </a:p>
           <a:p>
             <a:pPr lvl="4"/>
             <a:r>
-              <a:rPr lang="en-US" smtClean="0"/>
+              <a:rPr lang="en-US"/>
               <a:t>Fifth level</a:t>
             </a:r>
-            <a:endParaRPr lang="en-US"/>
           </a:p>
         </p:txBody>
       </p:sp>
@@ -2732,7 +2727,7 @@
           <a:p>
             <a:fld id="{5BCAD085-E8A6-8845-BD4E-CB4CCA059FC4}" type="datetimeFigureOut">
               <a:rPr lang="en-US" smtClean="0"/>
-              <a:t>1/27/13</a:t>
+              <a:t>6/24/26</a:t>
             </a:fld>
             <a:endParaRPr lang="en-US"/>
           </a:p>
@@ -3091,7 +3086,7 @@
 </file>
 
 <file path=ppt/slides/slide1.xml><?xml version="1.0" encoding="utf-8"?>
-<p:sld xmlns:a="http://schemas.openxmlformats.org/drawingml/2006/main" xmlns:p="http://schemas.openxmlformats.org/presentationml/2006/main" xmlns:r="http://schemas.openxmlformats.org/officeDocument/2006/relationships">
+<p:sld xmlns:a="http://schemas.openxmlformats.org/drawingml/2006/main" xmlns:r="http://schemas.openxmlformats.org/officeDocument/2006/relationships" xmlns:p="http://schemas.openxmlformats.org/presentationml/2006/main">
   <p:cSld>
     <p:bg>
       <p:bgPr>
@@ -3107,7 +3102,14 @@
         <p:cNvGrpSpPr/>
         <p:nvPr/>
       </p:nvGrpSpPr>
-      <p:grpSpPr/>
+      <p:grpSpPr>
+        <a:xfrm>
+          <a:off x="0" y="0"/>
+          <a:ext cx="0" cy="0"/>
+          <a:chOff x="0" y="0"/>
+          <a:chExt cx="0" cy="0"/>
+        </a:xfrm>
+      </p:grpSpPr>
       <p:sp>
         <p:nvSpPr>
           <p:cNvPr id="2" name="Rectangle 1"/>
@@ -3149,6 +3151,7 @@
           <a:lstStyle/>
           <a:p>
             <a:pPr algn="ctr"/>
+            <a:endParaRPr/>
           </a:p>
         </p:txBody>
       </p:sp>
@@ -3193,6 +3196,7 @@
           <a:lstStyle/>
           <a:p>
             <a:pPr algn="ctr"/>
+            <a:endParaRPr/>
           </a:p>
         </p:txBody>
       </p:sp>
@@ -3381,7 +3385,7 @@
         <p:spPr>
           <a:xfrm>
             <a:off x="914400" y="5943600"/>
-            <a:ext cx="10332720" cy="457200"/>
+            <a:ext cx="10332720" cy="292388"/>
           </a:xfrm>
           <a:prstGeom prst="rect">
             <a:avLst/>
@@ -3394,7 +3398,39 @@
           </a:bodyPr>
           <a:lstStyle/>
           <a:p>
-            <a:pPr algn="l"/>
+            <a:r>
+              <a:rPr sz="1300" b="0" i="0" dirty="0">
+                <a:solidFill>
+                  <a:srgbClr val="B6C4D6"/>
+                </a:solidFill>
+                <a:latin typeface="Calibri"/>
+              </a:rPr>
+              <a:t>Data Analyst Program, Hebrew University of Jerusalem   | </a:t>
+            </a:r>
+            <a:r>
+              <a:rPr lang="en-US" sz="1300" dirty="0">
+                <a:solidFill>
+                  <a:srgbClr val="8D99AE"/>
+                </a:solidFill>
+              </a:rPr>
+              <a:t>Noy Levy – David Zeff – Danielle Ab– Sagi Gutin- Shira </a:t>
+            </a:r>
+            <a:r>
+              <a:rPr lang="en-US" sz="1300" dirty="0" err="1">
+                <a:solidFill>
+                  <a:srgbClr val="8D99AE"/>
+                </a:solidFill>
+              </a:rPr>
+              <a:t>Meriash</a:t>
+            </a:r>
+            <a:r>
+              <a:rPr lang="en-US" sz="1300">
+                <a:solidFill>
+                  <a:srgbClr val="8D99AE"/>
+                </a:solidFill>
+              </a:rPr>
+              <a:t> </a:t>
+            </a:r>
             <a:r>
               <a:rPr sz="1300" b="0" i="0">
                 <a:solidFill>
@@ -3402,7 +3438,16 @@
                 </a:solidFill>
                 <a:latin typeface="Calibri"/>
               </a:rPr>
-              <a:t>Data Analyst Program, Hebrew University of Jerusalem   |   David Zeff   |   June 2026</a:t>
+              <a:t>|   </a:t>
+            </a:r>
+            <a:r>
+              <a:rPr sz="1300" b="0" i="0" dirty="0">
+                <a:solidFill>
+                  <a:srgbClr val="B6C4D6"/>
+                </a:solidFill>
+                <a:latin typeface="Calibri"/>
+              </a:rPr>
+              <a:t>June 2026</a:t>
             </a:r>
           </a:p>
         </p:txBody>
@@ -3416,7 +3461,7 @@
 </file>
 
 <file path=ppt/slides/slide10.xml><?xml version="1.0" encoding="utf-8"?>
-<p:sld xmlns:a="http://schemas.openxmlformats.org/drawingml/2006/main" xmlns:p="http://schemas.openxmlformats.org/presentationml/2006/main" xmlns:r="http://schemas.openxmlformats.org/officeDocument/2006/relationships">
+<p:sld xmlns:a="http://schemas.openxmlformats.org/drawingml/2006/main" xmlns:r="http://schemas.openxmlformats.org/officeDocument/2006/relationships" xmlns:p="http://schemas.openxmlformats.org/presentationml/2006/main">
   <p:cSld>
     <p:spTree>
       <p:nvGrpSpPr>
@@ -3424,7 +3469,14 @@
         <p:cNvGrpSpPr/>
         <p:nvPr/>
       </p:nvGrpSpPr>
-      <p:grpSpPr/>
+      <p:grpSpPr>
+        <a:xfrm>
+          <a:off x="0" y="0"/>
+          <a:ext cx="0" cy="0"/>
+          <a:chOff x="0" y="0"/>
+          <a:chExt cx="0" cy="0"/>
+        </a:xfrm>
+      </p:grpSpPr>
       <p:sp>
         <p:nvSpPr>
           <p:cNvPr id="2" name="Rectangle 1"/>
@@ -3466,6 +3518,7 @@
           <a:lstStyle/>
           <a:p>
             <a:pPr algn="ctr"/>
+            <a:endParaRPr/>
           </a:p>
         </p:txBody>
       </p:sp>
@@ -3510,6 +3563,7 @@
           <a:lstStyle/>
           <a:p>
             <a:pPr algn="ctr"/>
+            <a:endParaRPr/>
           </a:p>
         </p:txBody>
       </p:sp>
@@ -3663,6 +3717,7 @@
           <a:lstStyle/>
           <a:p>
             <a:pPr algn="ctr"/>
+            <a:endParaRPr/>
           </a:p>
         </p:txBody>
       </p:sp>
@@ -3707,6 +3762,7 @@
           <a:lstStyle/>
           <a:p>
             <a:pPr algn="ctr"/>
+            <a:endParaRPr/>
           </a:p>
         </p:txBody>
       </p:sp>
@@ -3860,6 +3916,7 @@
           <a:lstStyle/>
           <a:p>
             <a:pPr algn="ctr"/>
+            <a:endParaRPr/>
           </a:p>
         </p:txBody>
       </p:sp>
@@ -3904,6 +3961,7 @@
           <a:lstStyle/>
           <a:p>
             <a:pPr algn="ctr"/>
+            <a:endParaRPr/>
           </a:p>
         </p:txBody>
       </p:sp>
@@ -4057,6 +4115,7 @@
           <a:lstStyle/>
           <a:p>
             <a:pPr algn="ctr"/>
+            <a:endParaRPr/>
           </a:p>
         </p:txBody>
       </p:sp>
@@ -4101,6 +4160,7 @@
           <a:lstStyle/>
           <a:p>
             <a:pPr algn="ctr"/>
+            <a:endParaRPr/>
           </a:p>
         </p:txBody>
       </p:sp>
@@ -4252,6 +4312,7 @@
           <a:lstStyle/>
           <a:p>
             <a:pPr algn="ctr"/>
+            <a:endParaRPr/>
           </a:p>
         </p:txBody>
       </p:sp>
@@ -4296,6 +4357,7 @@
           <a:lstStyle/>
           <a:p>
             <a:pPr algn="ctr"/>
+            <a:endParaRPr/>
           </a:p>
         </p:txBody>
       </p:sp>
@@ -4429,7 +4491,7 @@
 </file>
 
 <file path=ppt/slides/slide11.xml><?xml version="1.0" encoding="utf-8"?>
-<p:sld xmlns:a="http://schemas.openxmlformats.org/drawingml/2006/main" xmlns:p="http://schemas.openxmlformats.org/presentationml/2006/main" xmlns:r="http://schemas.openxmlformats.org/officeDocument/2006/relationships">
+<p:sld xmlns:a="http://schemas.openxmlformats.org/drawingml/2006/main" xmlns:r="http://schemas.openxmlformats.org/officeDocument/2006/relationships" xmlns:p="http://schemas.openxmlformats.org/presentationml/2006/main">
   <p:cSld>
     <p:spTree>
       <p:nvGrpSpPr>
@@ -4437,7 +4499,14 @@
         <p:cNvGrpSpPr/>
         <p:nvPr/>
       </p:nvGrpSpPr>
-      <p:grpSpPr/>
+      <p:grpSpPr>
+        <a:xfrm>
+          <a:off x="0" y="0"/>
+          <a:ext cx="0" cy="0"/>
+          <a:chOff x="0" y="0"/>
+          <a:chExt cx="0" cy="0"/>
+        </a:xfrm>
+      </p:grpSpPr>
       <p:sp>
         <p:nvSpPr>
           <p:cNvPr id="2" name="Rectangle 1"/>
@@ -4479,6 +4548,7 @@
           <a:lstStyle/>
           <a:p>
             <a:pPr algn="ctr"/>
+            <a:endParaRPr/>
           </a:p>
         </p:txBody>
       </p:sp>
@@ -4523,6 +4593,7 @@
           <a:lstStyle/>
           <a:p>
             <a:pPr algn="ctr"/>
+            <a:endParaRPr/>
           </a:p>
         </p:txBody>
       </p:sp>
@@ -4633,7 +4704,7 @@
           </a:fontRef>
         </p:style>
         <p:txBody>
-          <a:bodyPr rtlCol="0" anchor="ctr" wrap="none"/>
+          <a:bodyPr wrap="none" rtlCol="0" anchor="ctr"/>
           <a:lstStyle/>
           <a:p>
             <a:pPr algn="ctr"/>
@@ -4756,7 +4827,7 @@
           </a:fontRef>
         </p:style>
         <p:txBody>
-          <a:bodyPr rtlCol="0" anchor="ctr" wrap="none"/>
+          <a:bodyPr wrap="none" rtlCol="0" anchor="ctr"/>
           <a:lstStyle/>
           <a:p>
             <a:pPr algn="ctr"/>
@@ -4879,7 +4950,7 @@
           </a:fontRef>
         </p:style>
         <p:txBody>
-          <a:bodyPr rtlCol="0" anchor="ctr" wrap="none"/>
+          <a:bodyPr wrap="none" rtlCol="0" anchor="ctr"/>
           <a:lstStyle/>
           <a:p>
             <a:pPr algn="ctr"/>
@@ -5002,7 +5073,7 @@
           </a:fontRef>
         </p:style>
         <p:txBody>
-          <a:bodyPr rtlCol="0" anchor="ctr" wrap="none"/>
+          <a:bodyPr wrap="none" rtlCol="0" anchor="ctr"/>
           <a:lstStyle/>
           <a:p>
             <a:pPr algn="ctr"/>
@@ -5125,7 +5196,7 @@
           </a:fontRef>
         </p:style>
         <p:txBody>
-          <a:bodyPr rtlCol="0" anchor="ctr" wrap="none"/>
+          <a:bodyPr wrap="none" rtlCol="0" anchor="ctr"/>
           <a:lstStyle/>
           <a:p>
             <a:pPr algn="ctr"/>
@@ -5290,7 +5361,7 @@
 </file>
 
 <file path=ppt/slides/slide12.xml><?xml version="1.0" encoding="utf-8"?>
-<p:sld xmlns:a="http://schemas.openxmlformats.org/drawingml/2006/main" xmlns:p="http://schemas.openxmlformats.org/presentationml/2006/main" xmlns:r="http://schemas.openxmlformats.org/officeDocument/2006/relationships">
+<p:sld xmlns:a="http://schemas.openxmlformats.org/drawingml/2006/main" xmlns:r="http://schemas.openxmlformats.org/officeDocument/2006/relationships" xmlns:p="http://schemas.openxmlformats.org/presentationml/2006/main">
   <p:cSld>
     <p:bg>
       <p:bgPr>
@@ -5306,7 +5377,14 @@
         <p:cNvGrpSpPr/>
         <p:nvPr/>
       </p:nvGrpSpPr>
-      <p:grpSpPr/>
+      <p:grpSpPr>
+        <a:xfrm>
+          <a:off x="0" y="0"/>
+          <a:ext cx="0" cy="0"/>
+          <a:chOff x="0" y="0"/>
+          <a:chExt cx="0" cy="0"/>
+        </a:xfrm>
+      </p:grpSpPr>
       <p:sp>
         <p:nvSpPr>
           <p:cNvPr id="2" name="Rectangle 1"/>
@@ -5348,6 +5426,7 @@
           <a:lstStyle/>
           <a:p>
             <a:pPr algn="ctr"/>
+            <a:endParaRPr/>
           </a:p>
         </p:txBody>
       </p:sp>
@@ -5571,6 +5650,7 @@
           <a:lstStyle/>
           <a:p>
             <a:pPr algn="ctr"/>
+            <a:endParaRPr/>
           </a:p>
         </p:txBody>
       </p:sp>
@@ -5618,7 +5698,7 @@
 </file>
 
 <file path=ppt/slides/slide13.xml><?xml version="1.0" encoding="utf-8"?>
-<p:sld xmlns:a="http://schemas.openxmlformats.org/drawingml/2006/main" xmlns:p="http://schemas.openxmlformats.org/presentationml/2006/main" xmlns:r="http://schemas.openxmlformats.org/officeDocument/2006/relationships">
+<p:sld xmlns:a="http://schemas.openxmlformats.org/drawingml/2006/main" xmlns:r="http://schemas.openxmlformats.org/officeDocument/2006/relationships" xmlns:p="http://schemas.openxmlformats.org/presentationml/2006/main">
   <p:cSld>
     <p:bg>
       <p:bgPr>
@@ -5634,7 +5714,14 @@
         <p:cNvGrpSpPr/>
         <p:nvPr/>
       </p:nvGrpSpPr>
-      <p:grpSpPr/>
+      <p:grpSpPr>
+        <a:xfrm>
+          <a:off x="0" y="0"/>
+          <a:ext cx="0" cy="0"/>
+          <a:chOff x="0" y="0"/>
+          <a:chExt cx="0" cy="0"/>
+        </a:xfrm>
+      </p:grpSpPr>
       <p:sp>
         <p:nvSpPr>
           <p:cNvPr id="2" name="Rectangle 1"/>
@@ -5676,6 +5763,7 @@
           <a:lstStyle/>
           <a:p>
             <a:pPr algn="ctr"/>
+            <a:endParaRPr/>
           </a:p>
         </p:txBody>
       </p:sp>
@@ -5758,7 +5846,7 @@
         <p:spPr>
           <a:xfrm>
             <a:off x="0" y="3657600"/>
-            <a:ext cx="12191695" cy="457200"/>
+            <a:ext cx="12191695" cy="292388"/>
           </a:xfrm>
           <a:prstGeom prst="rect">
             <a:avLst/>
@@ -5773,13 +5861,22 @@
           <a:p>
             <a:pPr algn="ctr"/>
             <a:r>
-              <a:rPr sz="1300" b="0" i="0">
+              <a:rPr lang="en-US" sz="1300" dirty="0">
                 <a:solidFill>
                   <a:srgbClr val="8D99AE"/>
                 </a:solidFill>
                 <a:latin typeface="Calibri"/>
               </a:rPr>
-              <a:t>David Zeff   ·   Data Analyst Program, Hebrew University of Jerusalem</a:t>
+              <a:t>Noy Levy – David Zeff – Danielle Ab– Sagi Gutin- Shira Meriash</a:t>
+            </a:r>
+            <a:r>
+              <a:rPr sz="1300" b="0" i="0" dirty="0">
+                <a:solidFill>
+                  <a:srgbClr val="8D99AE"/>
+                </a:solidFill>
+                <a:latin typeface="Calibri"/>
+              </a:rPr>
+              <a:t>·   Data Analyst Program, Hebrew University of Jerusalem</a:t>
             </a:r>
           </a:p>
         </p:txBody>
@@ -5793,7 +5890,7 @@
 </file>
 
 <file path=ppt/slides/slide2.xml><?xml version="1.0" encoding="utf-8"?>
-<p:sld xmlns:a="http://schemas.openxmlformats.org/drawingml/2006/main" xmlns:p="http://schemas.openxmlformats.org/presentationml/2006/main" xmlns:r="http://schemas.openxmlformats.org/officeDocument/2006/relationships">
+<p:sld xmlns:a="http://schemas.openxmlformats.org/drawingml/2006/main" xmlns:r="http://schemas.openxmlformats.org/officeDocument/2006/relationships" xmlns:p="http://schemas.openxmlformats.org/presentationml/2006/main">
   <p:cSld>
     <p:spTree>
       <p:nvGrpSpPr>
@@ -5801,7 +5898,14 @@
         <p:cNvGrpSpPr/>
         <p:nvPr/>
       </p:nvGrpSpPr>
-      <p:grpSpPr/>
+      <p:grpSpPr>
+        <a:xfrm>
+          <a:off x="0" y="0"/>
+          <a:ext cx="0" cy="0"/>
+          <a:chOff x="0" y="0"/>
+          <a:chExt cx="0" cy="0"/>
+        </a:xfrm>
+      </p:grpSpPr>
       <p:sp>
         <p:nvSpPr>
           <p:cNvPr id="2" name="Rectangle 1"/>
@@ -5843,6 +5947,7 @@
           <a:lstStyle/>
           <a:p>
             <a:pPr algn="ctr"/>
+            <a:endParaRPr/>
           </a:p>
         </p:txBody>
       </p:sp>
@@ -5887,6 +5992,7 @@
           <a:lstStyle/>
           <a:p>
             <a:pPr algn="ctr"/>
+            <a:endParaRPr/>
           </a:p>
         </p:txBody>
       </p:sp>
@@ -6003,6 +6109,7 @@
           <a:lstStyle/>
           <a:p>
             <a:pPr algn="ctr"/>
+            <a:endParaRPr/>
           </a:p>
         </p:txBody>
       </p:sp>
@@ -6119,6 +6226,7 @@
           <a:lstStyle/>
           <a:p>
             <a:pPr algn="ctr"/>
+            <a:endParaRPr/>
           </a:p>
         </p:txBody>
       </p:sp>
@@ -6235,6 +6343,7 @@
           <a:lstStyle/>
           <a:p>
             <a:pPr algn="ctr"/>
+            <a:endParaRPr/>
           </a:p>
         </p:txBody>
       </p:sp>
@@ -6351,6 +6460,7 @@
           <a:lstStyle/>
           <a:p>
             <a:pPr algn="ctr"/>
+            <a:endParaRPr/>
           </a:p>
         </p:txBody>
       </p:sp>
@@ -6467,6 +6577,7 @@
           <a:lstStyle/>
           <a:p>
             <a:pPr algn="ctr"/>
+            <a:endParaRPr/>
           </a:p>
         </p:txBody>
       </p:sp>
@@ -6619,7 +6730,7 @@
 </file>
 
 <file path=ppt/slides/slide3.xml><?xml version="1.0" encoding="utf-8"?>
-<p:sld xmlns:a="http://schemas.openxmlformats.org/drawingml/2006/main" xmlns:p="http://schemas.openxmlformats.org/presentationml/2006/main" xmlns:r="http://schemas.openxmlformats.org/officeDocument/2006/relationships">
+<p:sld xmlns:a="http://schemas.openxmlformats.org/drawingml/2006/main" xmlns:r="http://schemas.openxmlformats.org/officeDocument/2006/relationships" xmlns:p="http://schemas.openxmlformats.org/presentationml/2006/main">
   <p:cSld>
     <p:spTree>
       <p:nvGrpSpPr>
@@ -6627,7 +6738,14 @@
         <p:cNvGrpSpPr/>
         <p:nvPr/>
       </p:nvGrpSpPr>
-      <p:grpSpPr/>
+      <p:grpSpPr>
+        <a:xfrm>
+          <a:off x="0" y="0"/>
+          <a:ext cx="0" cy="0"/>
+          <a:chOff x="0" y="0"/>
+          <a:chExt cx="0" cy="0"/>
+        </a:xfrm>
+      </p:grpSpPr>
       <p:sp>
         <p:nvSpPr>
           <p:cNvPr id="2" name="Rectangle 1"/>
@@ -6669,6 +6787,7 @@
           <a:lstStyle/>
           <a:p>
             <a:pPr algn="ctr"/>
+            <a:endParaRPr/>
           </a:p>
         </p:txBody>
       </p:sp>
@@ -6713,6 +6832,7 @@
           <a:lstStyle/>
           <a:p>
             <a:pPr algn="ctr"/>
+            <a:endParaRPr/>
           </a:p>
         </p:txBody>
       </p:sp>
@@ -7002,6 +7122,7 @@
           <a:lstStyle/>
           <a:p>
             <a:pPr algn="ctr"/>
+            <a:endParaRPr/>
           </a:p>
         </p:txBody>
       </p:sp>
@@ -7108,7 +7229,7 @@
 </file>
 
 <file path=ppt/slides/slide4.xml><?xml version="1.0" encoding="utf-8"?>
-<p:sld xmlns:a="http://schemas.openxmlformats.org/drawingml/2006/main" xmlns:p="http://schemas.openxmlformats.org/presentationml/2006/main" xmlns:r="http://schemas.openxmlformats.org/officeDocument/2006/relationships">
+<p:sld xmlns:a="http://schemas.openxmlformats.org/drawingml/2006/main" xmlns:r="http://schemas.openxmlformats.org/officeDocument/2006/relationships" xmlns:p="http://schemas.openxmlformats.org/presentationml/2006/main">
   <p:cSld>
     <p:spTree>
       <p:nvGrpSpPr>
@@ -7116,7 +7237,14 @@
         <p:cNvGrpSpPr/>
         <p:nvPr/>
       </p:nvGrpSpPr>
-      <p:grpSpPr/>
+      <p:grpSpPr>
+        <a:xfrm>
+          <a:off x="0" y="0"/>
+          <a:ext cx="0" cy="0"/>
+          <a:chOff x="0" y="0"/>
+          <a:chExt cx="0" cy="0"/>
+        </a:xfrm>
+      </p:grpSpPr>
       <p:sp>
         <p:nvSpPr>
           <p:cNvPr id="2" name="Rectangle 1"/>
@@ -7158,6 +7286,7 @@
           <a:lstStyle/>
           <a:p>
             <a:pPr algn="ctr"/>
+            <a:endParaRPr/>
           </a:p>
         </p:txBody>
       </p:sp>
@@ -7202,6 +7331,7 @@
           <a:lstStyle/>
           <a:p>
             <a:pPr algn="ctr"/>
+            <a:endParaRPr/>
           </a:p>
         </p:txBody>
       </p:sp>
@@ -7318,6 +7448,7 @@
           <a:lstStyle/>
           <a:p>
             <a:pPr algn="ctr"/>
+            <a:endParaRPr/>
           </a:p>
         </p:txBody>
       </p:sp>
@@ -7362,6 +7493,7 @@
           <a:lstStyle/>
           <a:p>
             <a:pPr algn="ctr"/>
+            <a:endParaRPr/>
           </a:p>
         </p:txBody>
       </p:sp>
@@ -7515,6 +7647,7 @@
           <a:lstStyle/>
           <a:p>
             <a:pPr algn="ctr"/>
+            <a:endParaRPr/>
           </a:p>
         </p:txBody>
       </p:sp>
@@ -7559,6 +7692,7 @@
           <a:lstStyle/>
           <a:p>
             <a:pPr algn="ctr"/>
+            <a:endParaRPr/>
           </a:p>
         </p:txBody>
       </p:sp>
@@ -7712,6 +7846,7 @@
           <a:lstStyle/>
           <a:p>
             <a:pPr algn="ctr"/>
+            <a:endParaRPr/>
           </a:p>
         </p:txBody>
       </p:sp>
@@ -7756,6 +7891,7 @@
           <a:lstStyle/>
           <a:p>
             <a:pPr algn="ctr"/>
+            <a:endParaRPr/>
           </a:p>
         </p:txBody>
       </p:sp>
@@ -7909,6 +8045,7 @@
           <a:lstStyle/>
           <a:p>
             <a:pPr algn="ctr"/>
+            <a:endParaRPr/>
           </a:p>
         </p:txBody>
       </p:sp>
@@ -7953,6 +8090,7 @@
           <a:lstStyle/>
           <a:p>
             <a:pPr algn="ctr"/>
+            <a:endParaRPr/>
           </a:p>
         </p:txBody>
       </p:sp>
@@ -8106,6 +8244,7 @@
           <a:lstStyle/>
           <a:p>
             <a:pPr algn="ctr"/>
+            <a:endParaRPr/>
           </a:p>
         </p:txBody>
       </p:sp>
@@ -8150,6 +8289,7 @@
           <a:lstStyle/>
           <a:p>
             <a:pPr algn="ctr"/>
+            <a:endParaRPr/>
           </a:p>
         </p:txBody>
       </p:sp>
@@ -8543,7 +8683,7 @@
 </file>
 
 <file path=ppt/slides/slide5.xml><?xml version="1.0" encoding="utf-8"?>
-<p:sld xmlns:a="http://schemas.openxmlformats.org/drawingml/2006/main" xmlns:p="http://schemas.openxmlformats.org/presentationml/2006/main" xmlns:r="http://schemas.openxmlformats.org/officeDocument/2006/relationships">
+<p:sld xmlns:a="http://schemas.openxmlformats.org/drawingml/2006/main" xmlns:r="http://schemas.openxmlformats.org/officeDocument/2006/relationships" xmlns:p="http://schemas.openxmlformats.org/presentationml/2006/main">
   <p:cSld>
     <p:spTree>
       <p:nvGrpSpPr>
@@ -8551,7 +8691,14 @@
         <p:cNvGrpSpPr/>
         <p:nvPr/>
       </p:nvGrpSpPr>
-      <p:grpSpPr/>
+      <p:grpSpPr>
+        <a:xfrm>
+          <a:off x="0" y="0"/>
+          <a:ext cx="0" cy="0"/>
+          <a:chOff x="0" y="0"/>
+          <a:chExt cx="0" cy="0"/>
+        </a:xfrm>
+      </p:grpSpPr>
       <p:sp>
         <p:nvSpPr>
           <p:cNvPr id="2" name="Rectangle 1"/>
@@ -8593,6 +8740,7 @@
           <a:lstStyle/>
           <a:p>
             <a:pPr algn="ctr"/>
+            <a:endParaRPr/>
           </a:p>
         </p:txBody>
       </p:sp>
@@ -8637,6 +8785,7 @@
           <a:lstStyle/>
           <a:p>
             <a:pPr algn="ctr"/>
+            <a:endParaRPr/>
           </a:p>
         </p:txBody>
       </p:sp>
@@ -8961,6 +9110,7 @@
           <a:lstStyle/>
           <a:p>
             <a:pPr algn="ctr"/>
+            <a:endParaRPr/>
           </a:p>
         </p:txBody>
       </p:sp>
@@ -9005,6 +9155,7 @@
           <a:lstStyle/>
           <a:p>
             <a:pPr algn="ctr"/>
+            <a:endParaRPr/>
           </a:p>
         </p:txBody>
       </p:sp>
@@ -9102,6 +9253,7 @@
           <a:lstStyle/>
           <a:p>
             <a:pPr algn="ctr"/>
+            <a:endParaRPr/>
           </a:p>
         </p:txBody>
       </p:sp>
@@ -9569,7 +9721,7 @@
 </file>
 
 <file path=ppt/slides/slide6.xml><?xml version="1.0" encoding="utf-8"?>
-<p:sld xmlns:a="http://schemas.openxmlformats.org/drawingml/2006/main" xmlns:p="http://schemas.openxmlformats.org/presentationml/2006/main" xmlns:r="http://schemas.openxmlformats.org/officeDocument/2006/relationships">
+<p:sld xmlns:a="http://schemas.openxmlformats.org/drawingml/2006/main" xmlns:r="http://schemas.openxmlformats.org/officeDocument/2006/relationships" xmlns:p="http://schemas.openxmlformats.org/presentationml/2006/main">
   <p:cSld>
     <p:spTree>
       <p:nvGrpSpPr>
@@ -9577,7 +9729,14 @@
         <p:cNvGrpSpPr/>
         <p:nvPr/>
       </p:nvGrpSpPr>
-      <p:grpSpPr/>
+      <p:grpSpPr>
+        <a:xfrm>
+          <a:off x="0" y="0"/>
+          <a:ext cx="0" cy="0"/>
+          <a:chOff x="0" y="0"/>
+          <a:chExt cx="0" cy="0"/>
+        </a:xfrm>
+      </p:grpSpPr>
       <p:sp>
         <p:nvSpPr>
           <p:cNvPr id="2" name="Rectangle 1"/>
@@ -9619,6 +9778,7 @@
           <a:lstStyle/>
           <a:p>
             <a:pPr algn="ctr"/>
+            <a:endParaRPr/>
           </a:p>
         </p:txBody>
       </p:sp>
@@ -9663,6 +9823,7 @@
           <a:lstStyle/>
           <a:p>
             <a:pPr algn="ctr"/>
+            <a:endParaRPr/>
           </a:p>
         </p:txBody>
       </p:sp>
@@ -9781,6 +9942,7 @@
           <a:lstStyle/>
           <a:p>
             <a:pPr algn="ctr"/>
+            <a:endParaRPr/>
           </a:p>
         </p:txBody>
       </p:sp>
@@ -9887,7 +10049,7 @@
 </file>
 
 <file path=ppt/slides/slide7.xml><?xml version="1.0" encoding="utf-8"?>
-<p:sld xmlns:a="http://schemas.openxmlformats.org/drawingml/2006/main" xmlns:p="http://schemas.openxmlformats.org/presentationml/2006/main" xmlns:r="http://schemas.openxmlformats.org/officeDocument/2006/relationships">
+<p:sld xmlns:a="http://schemas.openxmlformats.org/drawingml/2006/main" xmlns:r="http://schemas.openxmlformats.org/officeDocument/2006/relationships" xmlns:p="http://schemas.openxmlformats.org/presentationml/2006/main">
   <p:cSld>
     <p:spTree>
       <p:nvGrpSpPr>
@@ -9895,7 +10057,14 @@
         <p:cNvGrpSpPr/>
         <p:nvPr/>
       </p:nvGrpSpPr>
-      <p:grpSpPr/>
+      <p:grpSpPr>
+        <a:xfrm>
+          <a:off x="0" y="0"/>
+          <a:ext cx="0" cy="0"/>
+          <a:chOff x="0" y="0"/>
+          <a:chExt cx="0" cy="0"/>
+        </a:xfrm>
+      </p:grpSpPr>
       <p:sp>
         <p:nvSpPr>
           <p:cNvPr id="2" name="Rectangle 1"/>
@@ -9937,6 +10106,7 @@
           <a:lstStyle/>
           <a:p>
             <a:pPr algn="ctr"/>
+            <a:endParaRPr/>
           </a:p>
         </p:txBody>
       </p:sp>
@@ -9981,6 +10151,7 @@
           <a:lstStyle/>
           <a:p>
             <a:pPr algn="ctr"/>
+            <a:endParaRPr/>
           </a:p>
         </p:txBody>
       </p:sp>
@@ -10099,6 +10270,7 @@
           <a:lstStyle/>
           <a:p>
             <a:pPr algn="ctr"/>
+            <a:endParaRPr/>
           </a:p>
         </p:txBody>
       </p:sp>
@@ -10340,6 +10512,7 @@
           <a:lstStyle/>
           <a:p>
             <a:pPr algn="ctr"/>
+            <a:endParaRPr/>
           </a:p>
         </p:txBody>
       </p:sp>
@@ -10384,6 +10557,7 @@
           <a:lstStyle/>
           <a:p>
             <a:pPr algn="ctr"/>
+            <a:endParaRPr/>
           </a:p>
         </p:txBody>
       </p:sp>
@@ -10517,7 +10691,7 @@
 </file>
 
 <file path=ppt/slides/slide8.xml><?xml version="1.0" encoding="utf-8"?>
-<p:sld xmlns:a="http://schemas.openxmlformats.org/drawingml/2006/main" xmlns:p="http://schemas.openxmlformats.org/presentationml/2006/main" xmlns:r="http://schemas.openxmlformats.org/officeDocument/2006/relationships">
+<p:sld xmlns:a="http://schemas.openxmlformats.org/drawingml/2006/main" xmlns:r="http://schemas.openxmlformats.org/officeDocument/2006/relationships" xmlns:p="http://schemas.openxmlformats.org/presentationml/2006/main">
   <p:cSld>
     <p:spTree>
       <p:nvGrpSpPr>
@@ -10525,7 +10699,14 @@
         <p:cNvGrpSpPr/>
         <p:nvPr/>
       </p:nvGrpSpPr>
-      <p:grpSpPr/>
+      <p:grpSpPr>
+        <a:xfrm>
+          <a:off x="0" y="0"/>
+          <a:ext cx="0" cy="0"/>
+          <a:chOff x="0" y="0"/>
+          <a:chExt cx="0" cy="0"/>
+        </a:xfrm>
+      </p:grpSpPr>
       <p:sp>
         <p:nvSpPr>
           <p:cNvPr id="2" name="Rectangle 1"/>
@@ -10567,6 +10748,7 @@
           <a:lstStyle/>
           <a:p>
             <a:pPr algn="ctr"/>
+            <a:endParaRPr/>
           </a:p>
         </p:txBody>
       </p:sp>
@@ -10611,6 +10793,7 @@
           <a:lstStyle/>
           <a:p>
             <a:pPr algn="ctr"/>
+            <a:endParaRPr/>
           </a:p>
         </p:txBody>
       </p:sp>
@@ -10729,6 +10912,7 @@
           <a:lstStyle/>
           <a:p>
             <a:pPr algn="ctr"/>
+            <a:endParaRPr/>
           </a:p>
         </p:txBody>
       </p:sp>
@@ -10801,6 +10985,7 @@
           <a:lstStyle/>
           <a:p>
             <a:pPr algn="ctr"/>
+            <a:endParaRPr/>
           </a:p>
         </p:txBody>
       </p:sp>
@@ -10871,6 +11056,7 @@
           <a:lstStyle/>
           <a:p>
             <a:pPr algn="ctr"/>
+            <a:endParaRPr/>
           </a:p>
         </p:txBody>
       </p:sp>
@@ -10915,6 +11101,7 @@
           <a:lstStyle/>
           <a:p>
             <a:pPr algn="ctr"/>
+            <a:endParaRPr/>
           </a:p>
         </p:txBody>
       </p:sp>
@@ -11048,7 +11235,7 @@
 </file>
 
 <file path=ppt/slides/slide9.xml><?xml version="1.0" encoding="utf-8"?>
-<p:sld xmlns:a="http://schemas.openxmlformats.org/drawingml/2006/main" xmlns:p="http://schemas.openxmlformats.org/presentationml/2006/main" xmlns:r="http://schemas.openxmlformats.org/officeDocument/2006/relationships">
+<p:sld xmlns:a="http://schemas.openxmlformats.org/drawingml/2006/main" xmlns:r="http://schemas.openxmlformats.org/officeDocument/2006/relationships" xmlns:p="http://schemas.openxmlformats.org/presentationml/2006/main">
   <p:cSld>
     <p:spTree>
       <p:nvGrpSpPr>
@@ -11056,7 +11243,14 @@
         <p:cNvGrpSpPr/>
         <p:nvPr/>
       </p:nvGrpSpPr>
-      <p:grpSpPr/>
+      <p:grpSpPr>
+        <a:xfrm>
+          <a:off x="0" y="0"/>
+          <a:ext cx="0" cy="0"/>
+          <a:chOff x="0" y="0"/>
+          <a:chExt cx="0" cy="0"/>
+        </a:xfrm>
+      </p:grpSpPr>
       <p:sp>
         <p:nvSpPr>
           <p:cNvPr id="2" name="Rectangle 1"/>
@@ -11098,6 +11292,7 @@
           <a:lstStyle/>
           <a:p>
             <a:pPr algn="ctr"/>
+            <a:endParaRPr/>
           </a:p>
         </p:txBody>
       </p:sp>
@@ -11142,6 +11337,7 @@
           <a:lstStyle/>
           <a:p>
             <a:pPr algn="ctr"/>
+            <a:endParaRPr/>
           </a:p>
         </p:txBody>
       </p:sp>
@@ -11260,6 +11456,7 @@
           <a:lstStyle/>
           <a:p>
             <a:pPr algn="ctr"/>
+            <a:endParaRPr/>
           </a:p>
         </p:txBody>
       </p:sp>
@@ -11332,6 +11529,7 @@
           <a:lstStyle/>
           <a:p>
             <a:pPr algn="ctr"/>
+            <a:endParaRPr/>
           </a:p>
         </p:txBody>
       </p:sp>
@@ -11402,6 +11600,7 @@
           <a:lstStyle/>
           <a:p>
             <a:pPr algn="ctr"/>
+            <a:endParaRPr/>
           </a:p>
         </p:txBody>
       </p:sp>
@@ -11446,6 +11645,7 @@
           <a:lstStyle/>
           <a:p>
             <a:pPr algn="ctr"/>
+            <a:endParaRPr/>
           </a:p>
         </p:txBody>
       </p:sp>

--- a/deliverables/Bank_Churn_Analysis.pptx
+++ b/deliverables/Bank_Churn_Analysis.pptx
@@ -5,21 +5,21 @@
     <p:sldMasterId id="2147483648" r:id="rId1"/>
   </p:sldMasterIdLst>
   <p:sldIdLst>
-    <p:sldId id="256" r:id="rId2"/>
-    <p:sldId id="257" r:id="rId3"/>
-    <p:sldId id="258" r:id="rId4"/>
-    <p:sldId id="259" r:id="rId5"/>
-    <p:sldId id="260" r:id="rId6"/>
-    <p:sldId id="261" r:id="rId7"/>
-    <p:sldId id="262" r:id="rId8"/>
-    <p:sldId id="263" r:id="rId9"/>
-    <p:sldId id="264" r:id="rId10"/>
-    <p:sldId id="265" r:id="rId11"/>
-    <p:sldId id="266" r:id="rId12"/>
-    <p:sldId id="267" r:id="rId13"/>
-    <p:sldId id="268" r:id="rId14"/>
+    <p:sldId id="256" r:id="rId7"/>
+    <p:sldId id="257" r:id="rId8"/>
+    <p:sldId id="258" r:id="rId9"/>
+    <p:sldId id="259" r:id="rId10"/>
+    <p:sldId id="260" r:id="rId11"/>
+    <p:sldId id="261" r:id="rId12"/>
+    <p:sldId id="262" r:id="rId13"/>
+    <p:sldId id="263" r:id="rId14"/>
+    <p:sldId id="264" r:id="rId15"/>
+    <p:sldId id="265" r:id="rId16"/>
+    <p:sldId id="266" r:id="rId17"/>
+    <p:sldId id="267" r:id="rId18"/>
+    <p:sldId id="268" r:id="rId19"/>
   </p:sldIdLst>
-  <p:sldSz cx="12192000" cy="6858000"/>
+  <p:sldSz cx="12191695" cy="6858000" type="screen4x3"/>
   <p:notesSz cx="6858000" cy="9144000"/>
   <p:defaultTextStyle>
     <a:defPPr>
@@ -116,22 +116,6 @@
       </a:defRPr>
     </a:lvl9pPr>
   </p:defaultTextStyle>
-  <p:extLst>
-    <p:ext uri="{EFAFB233-063F-42B5-8137-9DF3F51BA10A}">
-      <p15:sldGuideLst xmlns:p15="http://schemas.microsoft.com/office/powerpoint/2012/main">
-        <p15:guide id="1" orient="horz" pos="2160">
-          <p15:clr>
-            <a:srgbClr val="A4A3A4"/>
-          </p15:clr>
-        </p15:guide>
-        <p15:guide id="2" pos="2880">
-          <p15:clr>
-            <a:srgbClr val="A4A3A4"/>
-          </p15:clr>
-        </p15:guide>
-      </p15:sldGuideLst>
-    </p:ext>
-  </p:extLst>
 </p:presentation>
 </file>
 
@@ -173,9 +157,10 @@
           <a:lstStyle/>
           <a:p>
             <a:r>
-              <a:rPr lang="en-US"/>
+              <a:rPr lang="en-US" smtClean="0"/>
               <a:t>Click to edit Master title style</a:t>
             </a:r>
+            <a:endParaRPr lang="en-US"/>
           </a:p>
         </p:txBody>
       </p:sp>
@@ -291,9 +276,10 @@
           </a:lstStyle>
           <a:p>
             <a:r>
-              <a:rPr lang="en-US"/>
+              <a:rPr lang="en-US" smtClean="0"/>
               <a:t>Click to edit Master subtitle style</a:t>
             </a:r>
+            <a:endParaRPr lang="en-US"/>
           </a:p>
         </p:txBody>
       </p:sp>
@@ -314,7 +300,7 @@
           <a:p>
             <a:fld id="{5BCAD085-E8A6-8845-BD4E-CB4CCA059FC4}" type="datetimeFigureOut">
               <a:rPr lang="en-US" smtClean="0"/>
-              <a:t>6/24/26</a:t>
+              <a:t>1/27/13</a:t>
             </a:fld>
             <a:endParaRPr lang="en-US"/>
           </a:p>
@@ -408,9 +394,10 @@
           <a:lstStyle/>
           <a:p>
             <a:r>
-              <a:rPr lang="en-US"/>
+              <a:rPr lang="en-US" smtClean="0"/>
               <a:t>Click to edit Master title style</a:t>
             </a:r>
+            <a:endParaRPr lang="en-US"/>
           </a:p>
         </p:txBody>
       </p:sp>
@@ -431,37 +418,38 @@
           <a:p>
             <a:pPr lvl="0"/>
             <a:r>
-              <a:rPr lang="en-US"/>
+              <a:rPr lang="en-US" smtClean="0"/>
               <a:t>Click to edit Master text styles</a:t>
             </a:r>
           </a:p>
           <a:p>
             <a:pPr lvl="1"/>
             <a:r>
-              <a:rPr lang="en-US"/>
+              <a:rPr lang="en-US" smtClean="0"/>
               <a:t>Second level</a:t>
             </a:r>
           </a:p>
           <a:p>
             <a:pPr lvl="2"/>
             <a:r>
-              <a:rPr lang="en-US"/>
+              <a:rPr lang="en-US" smtClean="0"/>
               <a:t>Third level</a:t>
             </a:r>
           </a:p>
           <a:p>
             <a:pPr lvl="3"/>
             <a:r>
-              <a:rPr lang="en-US"/>
+              <a:rPr lang="en-US" smtClean="0"/>
               <a:t>Fourth level</a:t>
             </a:r>
           </a:p>
           <a:p>
             <a:pPr lvl="4"/>
             <a:r>
-              <a:rPr lang="en-US"/>
+              <a:rPr lang="en-US" smtClean="0"/>
               <a:t>Fifth level</a:t>
             </a:r>
+            <a:endParaRPr lang="en-US"/>
           </a:p>
         </p:txBody>
       </p:sp>
@@ -482,7 +470,7 @@
           <a:p>
             <a:fld id="{5BCAD085-E8A6-8845-BD4E-CB4CCA059FC4}" type="datetimeFigureOut">
               <a:rPr lang="en-US" smtClean="0"/>
-              <a:t>6/24/26</a:t>
+              <a:t>1/27/13</a:t>
             </a:fld>
             <a:endParaRPr lang="en-US"/>
           </a:p>
@@ -581,9 +569,10 @@
           <a:lstStyle/>
           <a:p>
             <a:r>
-              <a:rPr lang="en-US"/>
+              <a:rPr lang="en-US" smtClean="0"/>
               <a:t>Click to edit Master title style</a:t>
             </a:r>
+            <a:endParaRPr lang="en-US"/>
           </a:p>
         </p:txBody>
       </p:sp>
@@ -609,37 +598,38 @@
           <a:p>
             <a:pPr lvl="0"/>
             <a:r>
-              <a:rPr lang="en-US"/>
+              <a:rPr lang="en-US" smtClean="0"/>
               <a:t>Click to edit Master text styles</a:t>
             </a:r>
           </a:p>
           <a:p>
             <a:pPr lvl="1"/>
             <a:r>
-              <a:rPr lang="en-US"/>
+              <a:rPr lang="en-US" smtClean="0"/>
               <a:t>Second level</a:t>
             </a:r>
           </a:p>
           <a:p>
             <a:pPr lvl="2"/>
             <a:r>
-              <a:rPr lang="en-US"/>
+              <a:rPr lang="en-US" smtClean="0"/>
               <a:t>Third level</a:t>
             </a:r>
           </a:p>
           <a:p>
             <a:pPr lvl="3"/>
             <a:r>
-              <a:rPr lang="en-US"/>
+              <a:rPr lang="en-US" smtClean="0"/>
               <a:t>Fourth level</a:t>
             </a:r>
           </a:p>
           <a:p>
             <a:pPr lvl="4"/>
             <a:r>
-              <a:rPr lang="en-US"/>
+              <a:rPr lang="en-US" smtClean="0"/>
               <a:t>Fifth level</a:t>
             </a:r>
+            <a:endParaRPr lang="en-US"/>
           </a:p>
         </p:txBody>
       </p:sp>
@@ -660,7 +650,7 @@
           <a:p>
             <a:fld id="{5BCAD085-E8A6-8845-BD4E-CB4CCA059FC4}" type="datetimeFigureOut">
               <a:rPr lang="en-US" smtClean="0"/>
-              <a:t>6/24/26</a:t>
+              <a:t>1/27/13</a:t>
             </a:fld>
             <a:endParaRPr lang="en-US"/>
           </a:p>
@@ -754,9 +744,10 @@
           <a:lstStyle/>
           <a:p>
             <a:r>
-              <a:rPr lang="en-US"/>
+              <a:rPr lang="en-US" smtClean="0"/>
               <a:t>Click to edit Master title style</a:t>
             </a:r>
+            <a:endParaRPr lang="en-US"/>
           </a:p>
         </p:txBody>
       </p:sp>
@@ -777,37 +768,38 @@
           <a:p>
             <a:pPr lvl="0"/>
             <a:r>
-              <a:rPr lang="en-US"/>
+              <a:rPr lang="en-US" smtClean="0"/>
               <a:t>Click to edit Master text styles</a:t>
             </a:r>
           </a:p>
           <a:p>
             <a:pPr lvl="1"/>
             <a:r>
-              <a:rPr lang="en-US"/>
+              <a:rPr lang="en-US" smtClean="0"/>
               <a:t>Second level</a:t>
             </a:r>
           </a:p>
           <a:p>
             <a:pPr lvl="2"/>
             <a:r>
-              <a:rPr lang="en-US"/>
+              <a:rPr lang="en-US" smtClean="0"/>
               <a:t>Third level</a:t>
             </a:r>
           </a:p>
           <a:p>
             <a:pPr lvl="3"/>
             <a:r>
-              <a:rPr lang="en-US"/>
+              <a:rPr lang="en-US" smtClean="0"/>
               <a:t>Fourth level</a:t>
             </a:r>
           </a:p>
           <a:p>
             <a:pPr lvl="4"/>
             <a:r>
-              <a:rPr lang="en-US"/>
+              <a:rPr lang="en-US" smtClean="0"/>
               <a:t>Fifth level</a:t>
             </a:r>
+            <a:endParaRPr lang="en-US"/>
           </a:p>
         </p:txBody>
       </p:sp>
@@ -828,7 +820,7 @@
           <a:p>
             <a:fld id="{5BCAD085-E8A6-8845-BD4E-CB4CCA059FC4}" type="datetimeFigureOut">
               <a:rPr lang="en-US" smtClean="0"/>
-              <a:t>6/24/26</a:t>
+              <a:t>1/27/13</a:t>
             </a:fld>
             <a:endParaRPr lang="en-US"/>
           </a:p>
@@ -931,9 +923,10 @@
           </a:lstStyle>
           <a:p>
             <a:r>
-              <a:rPr lang="en-US"/>
+              <a:rPr lang="en-US" smtClean="0"/>
               <a:t>Click to edit Master title style</a:t>
             </a:r>
+            <a:endParaRPr lang="en-US"/>
           </a:p>
         </p:txBody>
       </p:sp>
@@ -1050,7 +1043,7 @@
           <a:p>
             <a:pPr lvl="0"/>
             <a:r>
-              <a:rPr lang="en-US"/>
+              <a:rPr lang="en-US" smtClean="0"/>
               <a:t>Click to edit Master text styles</a:t>
             </a:r>
           </a:p>
@@ -1073,7 +1066,7 @@
           <a:p>
             <a:fld id="{5BCAD085-E8A6-8845-BD4E-CB4CCA059FC4}" type="datetimeFigureOut">
               <a:rPr lang="en-US" smtClean="0"/>
-              <a:t>6/24/26</a:t>
+              <a:t>1/27/13</a:t>
             </a:fld>
             <a:endParaRPr lang="en-US"/>
           </a:p>
@@ -1167,9 +1160,10 @@
           <a:lstStyle/>
           <a:p>
             <a:r>
-              <a:rPr lang="en-US"/>
+              <a:rPr lang="en-US" smtClean="0"/>
               <a:t>Click to edit Master title style</a:t>
             </a:r>
+            <a:endParaRPr lang="en-US"/>
           </a:p>
         </p:txBody>
       </p:sp>
@@ -1223,37 +1217,38 @@
           <a:p>
             <a:pPr lvl="0"/>
             <a:r>
-              <a:rPr lang="en-US"/>
+              <a:rPr lang="en-US" smtClean="0"/>
               <a:t>Click to edit Master text styles</a:t>
             </a:r>
           </a:p>
           <a:p>
             <a:pPr lvl="1"/>
             <a:r>
-              <a:rPr lang="en-US"/>
+              <a:rPr lang="en-US" smtClean="0"/>
               <a:t>Second level</a:t>
             </a:r>
           </a:p>
           <a:p>
             <a:pPr lvl="2"/>
             <a:r>
-              <a:rPr lang="en-US"/>
+              <a:rPr lang="en-US" smtClean="0"/>
               <a:t>Third level</a:t>
             </a:r>
           </a:p>
           <a:p>
             <a:pPr lvl="3"/>
             <a:r>
-              <a:rPr lang="en-US"/>
+              <a:rPr lang="en-US" smtClean="0"/>
               <a:t>Fourth level</a:t>
             </a:r>
           </a:p>
           <a:p>
             <a:pPr lvl="4"/>
             <a:r>
-              <a:rPr lang="en-US"/>
+              <a:rPr lang="en-US" smtClean="0"/>
               <a:t>Fifth level</a:t>
             </a:r>
+            <a:endParaRPr lang="en-US"/>
           </a:p>
         </p:txBody>
       </p:sp>
@@ -1307,37 +1302,38 @@
           <a:p>
             <a:pPr lvl="0"/>
             <a:r>
-              <a:rPr lang="en-US"/>
+              <a:rPr lang="en-US" smtClean="0"/>
               <a:t>Click to edit Master text styles</a:t>
             </a:r>
           </a:p>
           <a:p>
             <a:pPr lvl="1"/>
             <a:r>
-              <a:rPr lang="en-US"/>
+              <a:rPr lang="en-US" smtClean="0"/>
               <a:t>Second level</a:t>
             </a:r>
           </a:p>
           <a:p>
             <a:pPr lvl="2"/>
             <a:r>
-              <a:rPr lang="en-US"/>
+              <a:rPr lang="en-US" smtClean="0"/>
               <a:t>Third level</a:t>
             </a:r>
           </a:p>
           <a:p>
             <a:pPr lvl="3"/>
             <a:r>
-              <a:rPr lang="en-US"/>
+              <a:rPr lang="en-US" smtClean="0"/>
               <a:t>Fourth level</a:t>
             </a:r>
           </a:p>
           <a:p>
             <a:pPr lvl="4"/>
             <a:r>
-              <a:rPr lang="en-US"/>
+              <a:rPr lang="en-US" smtClean="0"/>
               <a:t>Fifth level</a:t>
             </a:r>
+            <a:endParaRPr lang="en-US"/>
           </a:p>
         </p:txBody>
       </p:sp>
@@ -1358,7 +1354,7 @@
           <a:p>
             <a:fld id="{5BCAD085-E8A6-8845-BD4E-CB4CCA059FC4}" type="datetimeFigureOut">
               <a:rPr lang="en-US" smtClean="0"/>
-              <a:t>6/24/26</a:t>
+              <a:t>1/27/13</a:t>
             </a:fld>
             <a:endParaRPr lang="en-US"/>
           </a:p>
@@ -1456,9 +1452,10 @@
           </a:lstStyle>
           <a:p>
             <a:r>
-              <a:rPr lang="en-US"/>
+              <a:rPr lang="en-US" smtClean="0"/>
               <a:t>Click to edit Master title style</a:t>
             </a:r>
+            <a:endParaRPr lang="en-US"/>
           </a:p>
         </p:txBody>
       </p:sp>
@@ -1521,7 +1518,7 @@
           <a:p>
             <a:pPr lvl="0"/>
             <a:r>
-              <a:rPr lang="en-US"/>
+              <a:rPr lang="en-US" smtClean="0"/>
               <a:t>Click to edit Master text styles</a:t>
             </a:r>
           </a:p>
@@ -1577,37 +1574,38 @@
           <a:p>
             <a:pPr lvl="0"/>
             <a:r>
-              <a:rPr lang="en-US"/>
+              <a:rPr lang="en-US" smtClean="0"/>
               <a:t>Click to edit Master text styles</a:t>
             </a:r>
           </a:p>
           <a:p>
             <a:pPr lvl="1"/>
             <a:r>
-              <a:rPr lang="en-US"/>
+              <a:rPr lang="en-US" smtClean="0"/>
               <a:t>Second level</a:t>
             </a:r>
           </a:p>
           <a:p>
             <a:pPr lvl="2"/>
             <a:r>
-              <a:rPr lang="en-US"/>
+              <a:rPr lang="en-US" smtClean="0"/>
               <a:t>Third level</a:t>
             </a:r>
           </a:p>
           <a:p>
             <a:pPr lvl="3"/>
             <a:r>
-              <a:rPr lang="en-US"/>
+              <a:rPr lang="en-US" smtClean="0"/>
               <a:t>Fourth level</a:t>
             </a:r>
           </a:p>
           <a:p>
             <a:pPr lvl="4"/>
             <a:r>
-              <a:rPr lang="en-US"/>
+              <a:rPr lang="en-US" smtClean="0"/>
               <a:t>Fifth level</a:t>
             </a:r>
+            <a:endParaRPr lang="en-US"/>
           </a:p>
         </p:txBody>
       </p:sp>
@@ -1670,7 +1668,7 @@
           <a:p>
             <a:pPr lvl="0"/>
             <a:r>
-              <a:rPr lang="en-US"/>
+              <a:rPr lang="en-US" smtClean="0"/>
               <a:t>Click to edit Master text styles</a:t>
             </a:r>
           </a:p>
@@ -1726,37 +1724,38 @@
           <a:p>
             <a:pPr lvl="0"/>
             <a:r>
-              <a:rPr lang="en-US"/>
+              <a:rPr lang="en-US" smtClean="0"/>
               <a:t>Click to edit Master text styles</a:t>
             </a:r>
           </a:p>
           <a:p>
             <a:pPr lvl="1"/>
             <a:r>
-              <a:rPr lang="en-US"/>
+              <a:rPr lang="en-US" smtClean="0"/>
               <a:t>Second level</a:t>
             </a:r>
           </a:p>
           <a:p>
             <a:pPr lvl="2"/>
             <a:r>
-              <a:rPr lang="en-US"/>
+              <a:rPr lang="en-US" smtClean="0"/>
               <a:t>Third level</a:t>
             </a:r>
           </a:p>
           <a:p>
             <a:pPr lvl="3"/>
             <a:r>
-              <a:rPr lang="en-US"/>
+              <a:rPr lang="en-US" smtClean="0"/>
               <a:t>Fourth level</a:t>
             </a:r>
           </a:p>
           <a:p>
             <a:pPr lvl="4"/>
             <a:r>
-              <a:rPr lang="en-US"/>
+              <a:rPr lang="en-US" smtClean="0"/>
               <a:t>Fifth level</a:t>
             </a:r>
+            <a:endParaRPr lang="en-US"/>
           </a:p>
         </p:txBody>
       </p:sp>
@@ -1777,7 +1776,7 @@
           <a:p>
             <a:fld id="{5BCAD085-E8A6-8845-BD4E-CB4CCA059FC4}" type="datetimeFigureOut">
               <a:rPr lang="en-US" smtClean="0"/>
-              <a:t>6/24/26</a:t>
+              <a:t>1/27/13</a:t>
             </a:fld>
             <a:endParaRPr lang="en-US"/>
           </a:p>
@@ -1871,9 +1870,10 @@
           <a:lstStyle/>
           <a:p>
             <a:r>
-              <a:rPr lang="en-US"/>
+              <a:rPr lang="en-US" smtClean="0"/>
               <a:t>Click to edit Master title style</a:t>
             </a:r>
+            <a:endParaRPr lang="en-US"/>
           </a:p>
         </p:txBody>
       </p:sp>
@@ -1894,7 +1894,7 @@
           <a:p>
             <a:fld id="{5BCAD085-E8A6-8845-BD4E-CB4CCA059FC4}" type="datetimeFigureOut">
               <a:rPr lang="en-US" smtClean="0"/>
-              <a:t>6/24/26</a:t>
+              <a:t>1/27/13</a:t>
             </a:fld>
             <a:endParaRPr lang="en-US"/>
           </a:p>
@@ -1989,7 +1989,7 @@
           <a:p>
             <a:fld id="{5BCAD085-E8A6-8845-BD4E-CB4CCA059FC4}" type="datetimeFigureOut">
               <a:rPr lang="en-US" smtClean="0"/>
-              <a:t>6/24/26</a:t>
+              <a:t>1/27/13</a:t>
             </a:fld>
             <a:endParaRPr lang="en-US"/>
           </a:p>
@@ -2092,9 +2092,10 @@
           </a:lstStyle>
           <a:p>
             <a:r>
-              <a:rPr lang="en-US"/>
+              <a:rPr lang="en-US" smtClean="0"/>
               <a:t>Click to edit Master title style</a:t>
             </a:r>
+            <a:endParaRPr lang="en-US"/>
           </a:p>
         </p:txBody>
       </p:sp>
@@ -2148,37 +2149,38 @@
           <a:p>
             <a:pPr lvl="0"/>
             <a:r>
-              <a:rPr lang="en-US"/>
+              <a:rPr lang="en-US" smtClean="0"/>
               <a:t>Click to edit Master text styles</a:t>
             </a:r>
           </a:p>
           <a:p>
             <a:pPr lvl="1"/>
             <a:r>
-              <a:rPr lang="en-US"/>
+              <a:rPr lang="en-US" smtClean="0"/>
               <a:t>Second level</a:t>
             </a:r>
           </a:p>
           <a:p>
             <a:pPr lvl="2"/>
             <a:r>
-              <a:rPr lang="en-US"/>
+              <a:rPr lang="en-US" smtClean="0"/>
               <a:t>Third level</a:t>
             </a:r>
           </a:p>
           <a:p>
             <a:pPr lvl="3"/>
             <a:r>
-              <a:rPr lang="en-US"/>
+              <a:rPr lang="en-US" smtClean="0"/>
               <a:t>Fourth level</a:t>
             </a:r>
           </a:p>
           <a:p>
             <a:pPr lvl="4"/>
             <a:r>
-              <a:rPr lang="en-US"/>
+              <a:rPr lang="en-US" smtClean="0"/>
               <a:t>Fifth level</a:t>
             </a:r>
+            <a:endParaRPr lang="en-US"/>
           </a:p>
         </p:txBody>
       </p:sp>
@@ -2241,7 +2243,7 @@
           <a:p>
             <a:pPr lvl="0"/>
             <a:r>
-              <a:rPr lang="en-US"/>
+              <a:rPr lang="en-US" smtClean="0"/>
               <a:t>Click to edit Master text styles</a:t>
             </a:r>
           </a:p>
@@ -2264,7 +2266,7 @@
           <a:p>
             <a:fld id="{5BCAD085-E8A6-8845-BD4E-CB4CCA059FC4}" type="datetimeFigureOut">
               <a:rPr lang="en-US" smtClean="0"/>
-              <a:t>6/24/26</a:t>
+              <a:t>1/27/13</a:t>
             </a:fld>
             <a:endParaRPr lang="en-US"/>
           </a:p>
@@ -2367,9 +2369,10 @@
           </a:lstStyle>
           <a:p>
             <a:r>
-              <a:rPr lang="en-US"/>
+              <a:rPr lang="en-US" smtClean="0"/>
               <a:t>Click to edit Master title style</a:t>
             </a:r>
+            <a:endParaRPr lang="en-US"/>
           </a:p>
         </p:txBody>
       </p:sp>
@@ -2493,7 +2496,7 @@
           <a:p>
             <a:pPr lvl="0"/>
             <a:r>
-              <a:rPr lang="en-US"/>
+              <a:rPr lang="en-US" smtClean="0"/>
               <a:t>Click to edit Master text styles</a:t>
             </a:r>
           </a:p>
@@ -2516,7 +2519,7 @@
           <a:p>
             <a:fld id="{5BCAD085-E8A6-8845-BD4E-CB4CCA059FC4}" type="datetimeFigureOut">
               <a:rPr lang="en-US" smtClean="0"/>
-              <a:t>6/24/26</a:t>
+              <a:t>1/27/13</a:t>
             </a:fld>
             <a:endParaRPr lang="en-US"/>
           </a:p>
@@ -2625,9 +2628,10 @@
           <a:lstStyle/>
           <a:p>
             <a:r>
-              <a:rPr lang="en-US"/>
+              <a:rPr lang="en-US" smtClean="0"/>
               <a:t>Click to edit Master title style</a:t>
             </a:r>
+            <a:endParaRPr lang="en-US"/>
           </a:p>
         </p:txBody>
       </p:sp>
@@ -2658,37 +2662,38 @@
           <a:p>
             <a:pPr lvl="0"/>
             <a:r>
-              <a:rPr lang="en-US"/>
+              <a:rPr lang="en-US" smtClean="0"/>
               <a:t>Click to edit Master text styles</a:t>
             </a:r>
           </a:p>
           <a:p>
             <a:pPr lvl="1"/>
             <a:r>
-              <a:rPr lang="en-US"/>
+              <a:rPr lang="en-US" smtClean="0"/>
               <a:t>Second level</a:t>
             </a:r>
           </a:p>
           <a:p>
             <a:pPr lvl="2"/>
             <a:r>
-              <a:rPr lang="en-US"/>
+              <a:rPr lang="en-US" smtClean="0"/>
               <a:t>Third level</a:t>
             </a:r>
           </a:p>
           <a:p>
             <a:pPr lvl="3"/>
             <a:r>
-              <a:rPr lang="en-US"/>
+              <a:rPr lang="en-US" smtClean="0"/>
               <a:t>Fourth level</a:t>
             </a:r>
           </a:p>
           <a:p>
             <a:pPr lvl="4"/>
             <a:r>
-              <a:rPr lang="en-US"/>
+              <a:rPr lang="en-US" smtClean="0"/>
               <a:t>Fifth level</a:t>
             </a:r>
+            <a:endParaRPr lang="en-US"/>
           </a:p>
         </p:txBody>
       </p:sp>
@@ -2727,7 +2732,7 @@
           <a:p>
             <a:fld id="{5BCAD085-E8A6-8845-BD4E-CB4CCA059FC4}" type="datetimeFigureOut">
               <a:rPr lang="en-US" smtClean="0"/>
-              <a:t>6/24/26</a:t>
+              <a:t>1/27/13</a:t>
             </a:fld>
             <a:endParaRPr lang="en-US"/>
           </a:p>
@@ -3086,7 +3091,7 @@
 </file>
 
 <file path=ppt/slides/slide1.xml><?xml version="1.0" encoding="utf-8"?>
-<p:sld xmlns:a="http://schemas.openxmlformats.org/drawingml/2006/main" xmlns:r="http://schemas.openxmlformats.org/officeDocument/2006/relationships" xmlns:p="http://schemas.openxmlformats.org/presentationml/2006/main">
+<p:sld xmlns:a="http://schemas.openxmlformats.org/drawingml/2006/main" xmlns:p="http://schemas.openxmlformats.org/presentationml/2006/main" xmlns:r="http://schemas.openxmlformats.org/officeDocument/2006/relationships">
   <p:cSld>
     <p:bg>
       <p:bgPr>
@@ -3102,14 +3107,7 @@
         <p:cNvGrpSpPr/>
         <p:nvPr/>
       </p:nvGrpSpPr>
-      <p:grpSpPr>
-        <a:xfrm>
-          <a:off x="0" y="0"/>
-          <a:ext cx="0" cy="0"/>
-          <a:chOff x="0" y="0"/>
-          <a:chExt cx="0" cy="0"/>
-        </a:xfrm>
-      </p:grpSpPr>
+      <p:grpSpPr/>
       <p:sp>
         <p:nvSpPr>
           <p:cNvPr id="2" name="Rectangle 1"/>
@@ -3151,7 +3149,6 @@
           <a:lstStyle/>
           <a:p>
             <a:pPr algn="ctr"/>
-            <a:endParaRPr/>
           </a:p>
         </p:txBody>
       </p:sp>
@@ -3196,7 +3193,6 @@
           <a:lstStyle/>
           <a:p>
             <a:pPr algn="ctr"/>
-            <a:endParaRPr/>
           </a:p>
         </p:txBody>
       </p:sp>
@@ -3385,7 +3381,7 @@
         <p:spPr>
           <a:xfrm>
             <a:off x="914400" y="5943600"/>
-            <a:ext cx="10332720" cy="292388"/>
+            <a:ext cx="10332720" cy="457200"/>
           </a:xfrm>
           <a:prstGeom prst="rect">
             <a:avLst/>
@@ -3398,56 +3394,15 @@
           </a:bodyPr>
           <a:lstStyle/>
           <a:p>
-            <a:r>
-              <a:rPr sz="1300" b="0" i="0" dirty="0">
+            <a:pPr algn="l"/>
+            <a:r>
+              <a:rPr sz="1300" b="0" i="0">
                 <a:solidFill>
                   <a:srgbClr val="B6C4D6"/>
                 </a:solidFill>
                 <a:latin typeface="Calibri"/>
               </a:rPr>
-              <a:t>Data Analyst Program, Hebrew University of Jerusalem   | </a:t>
-            </a:r>
-            <a:r>
-              <a:rPr lang="en-US" sz="1300" dirty="0">
-                <a:solidFill>
-                  <a:srgbClr val="8D99AE"/>
-                </a:solidFill>
-              </a:rPr>
-              <a:t>Noy Levy – David Zeff – Danielle Ab– Sagi Gutin- Shira </a:t>
-            </a:r>
-            <a:r>
-              <a:rPr lang="en-US" sz="1300" dirty="0" err="1">
-                <a:solidFill>
-                  <a:srgbClr val="8D99AE"/>
-                </a:solidFill>
-              </a:rPr>
-              <a:t>Meriash</a:t>
-            </a:r>
-            <a:r>
-              <a:rPr lang="en-US" sz="1300">
-                <a:solidFill>
-                  <a:srgbClr val="8D99AE"/>
-                </a:solidFill>
-              </a:rPr>
-              <a:t> </a:t>
-            </a:r>
-            <a:r>
-              <a:rPr sz="1300" b="0" i="0">
-                <a:solidFill>
-                  <a:srgbClr val="B6C4D6"/>
-                </a:solidFill>
-                <a:latin typeface="Calibri"/>
-              </a:rPr>
-              <a:t>|   </a:t>
-            </a:r>
-            <a:r>
-              <a:rPr sz="1300" b="0" i="0" dirty="0">
-                <a:solidFill>
-                  <a:srgbClr val="B6C4D6"/>
-                </a:solidFill>
-                <a:latin typeface="Calibri"/>
-              </a:rPr>
-              <a:t>June 2026</a:t>
+              <a:t>Data Analyst Program, Hebrew University of Jerusalem   |   Noy Levy, David Zeff, Danielle Ab, Sagi Gutin, Shira Meriash   |   June 2026</a:t>
             </a:r>
           </a:p>
         </p:txBody>
@@ -3461,7 +3416,7 @@
 </file>
 
 <file path=ppt/slides/slide10.xml><?xml version="1.0" encoding="utf-8"?>
-<p:sld xmlns:a="http://schemas.openxmlformats.org/drawingml/2006/main" xmlns:r="http://schemas.openxmlformats.org/officeDocument/2006/relationships" xmlns:p="http://schemas.openxmlformats.org/presentationml/2006/main">
+<p:sld xmlns:a="http://schemas.openxmlformats.org/drawingml/2006/main" xmlns:p="http://schemas.openxmlformats.org/presentationml/2006/main" xmlns:r="http://schemas.openxmlformats.org/officeDocument/2006/relationships">
   <p:cSld>
     <p:spTree>
       <p:nvGrpSpPr>
@@ -3469,14 +3424,7 @@
         <p:cNvGrpSpPr/>
         <p:nvPr/>
       </p:nvGrpSpPr>
-      <p:grpSpPr>
-        <a:xfrm>
-          <a:off x="0" y="0"/>
-          <a:ext cx="0" cy="0"/>
-          <a:chOff x="0" y="0"/>
-          <a:chExt cx="0" cy="0"/>
-        </a:xfrm>
-      </p:grpSpPr>
+      <p:grpSpPr/>
       <p:sp>
         <p:nvSpPr>
           <p:cNvPr id="2" name="Rectangle 1"/>
@@ -3518,7 +3466,6 @@
           <a:lstStyle/>
           <a:p>
             <a:pPr algn="ctr"/>
-            <a:endParaRPr/>
           </a:p>
         </p:txBody>
       </p:sp>
@@ -3563,7 +3510,6 @@
           <a:lstStyle/>
           <a:p>
             <a:pPr algn="ctr"/>
-            <a:endParaRPr/>
           </a:p>
         </p:txBody>
       </p:sp>
@@ -3717,7 +3663,6 @@
           <a:lstStyle/>
           <a:p>
             <a:pPr algn="ctr"/>
-            <a:endParaRPr/>
           </a:p>
         </p:txBody>
       </p:sp>
@@ -3762,7 +3707,6 @@
           <a:lstStyle/>
           <a:p>
             <a:pPr algn="ctr"/>
-            <a:endParaRPr/>
           </a:p>
         </p:txBody>
       </p:sp>
@@ -3916,7 +3860,6 @@
           <a:lstStyle/>
           <a:p>
             <a:pPr algn="ctr"/>
-            <a:endParaRPr/>
           </a:p>
         </p:txBody>
       </p:sp>
@@ -3961,7 +3904,6 @@
           <a:lstStyle/>
           <a:p>
             <a:pPr algn="ctr"/>
-            <a:endParaRPr/>
           </a:p>
         </p:txBody>
       </p:sp>
@@ -4115,7 +4057,6 @@
           <a:lstStyle/>
           <a:p>
             <a:pPr algn="ctr"/>
-            <a:endParaRPr/>
           </a:p>
         </p:txBody>
       </p:sp>
@@ -4160,7 +4101,6 @@
           <a:lstStyle/>
           <a:p>
             <a:pPr algn="ctr"/>
-            <a:endParaRPr/>
           </a:p>
         </p:txBody>
       </p:sp>
@@ -4312,7 +4252,6 @@
           <a:lstStyle/>
           <a:p>
             <a:pPr algn="ctr"/>
-            <a:endParaRPr/>
           </a:p>
         </p:txBody>
       </p:sp>
@@ -4357,7 +4296,6 @@
           <a:lstStyle/>
           <a:p>
             <a:pPr algn="ctr"/>
-            <a:endParaRPr/>
           </a:p>
         </p:txBody>
       </p:sp>
@@ -4491,7 +4429,7 @@
 </file>
 
 <file path=ppt/slides/slide11.xml><?xml version="1.0" encoding="utf-8"?>
-<p:sld xmlns:a="http://schemas.openxmlformats.org/drawingml/2006/main" xmlns:r="http://schemas.openxmlformats.org/officeDocument/2006/relationships" xmlns:p="http://schemas.openxmlformats.org/presentationml/2006/main">
+<p:sld xmlns:a="http://schemas.openxmlformats.org/drawingml/2006/main" xmlns:p="http://schemas.openxmlformats.org/presentationml/2006/main" xmlns:r="http://schemas.openxmlformats.org/officeDocument/2006/relationships">
   <p:cSld>
     <p:spTree>
       <p:nvGrpSpPr>
@@ -4499,14 +4437,7 @@
         <p:cNvGrpSpPr/>
         <p:nvPr/>
       </p:nvGrpSpPr>
-      <p:grpSpPr>
-        <a:xfrm>
-          <a:off x="0" y="0"/>
-          <a:ext cx="0" cy="0"/>
-          <a:chOff x="0" y="0"/>
-          <a:chExt cx="0" cy="0"/>
-        </a:xfrm>
-      </p:grpSpPr>
+      <p:grpSpPr/>
       <p:sp>
         <p:nvSpPr>
           <p:cNvPr id="2" name="Rectangle 1"/>
@@ -4548,7 +4479,6 @@
           <a:lstStyle/>
           <a:p>
             <a:pPr algn="ctr"/>
-            <a:endParaRPr/>
           </a:p>
         </p:txBody>
       </p:sp>
@@ -4593,7 +4523,6 @@
           <a:lstStyle/>
           <a:p>
             <a:pPr algn="ctr"/>
-            <a:endParaRPr/>
           </a:p>
         </p:txBody>
       </p:sp>
@@ -4704,7 +4633,7 @@
           </a:fontRef>
         </p:style>
         <p:txBody>
-          <a:bodyPr wrap="none" rtlCol="0" anchor="ctr"/>
+          <a:bodyPr rtlCol="0" anchor="ctr" wrap="none"/>
           <a:lstStyle/>
           <a:p>
             <a:pPr algn="ctr"/>
@@ -4827,7 +4756,7 @@
           </a:fontRef>
         </p:style>
         <p:txBody>
-          <a:bodyPr wrap="none" rtlCol="0" anchor="ctr"/>
+          <a:bodyPr rtlCol="0" anchor="ctr" wrap="none"/>
           <a:lstStyle/>
           <a:p>
             <a:pPr algn="ctr"/>
@@ -4950,7 +4879,7 @@
           </a:fontRef>
         </p:style>
         <p:txBody>
-          <a:bodyPr wrap="none" rtlCol="0" anchor="ctr"/>
+          <a:bodyPr rtlCol="0" anchor="ctr" wrap="none"/>
           <a:lstStyle/>
           <a:p>
             <a:pPr algn="ctr"/>
@@ -5073,7 +5002,7 @@
           </a:fontRef>
         </p:style>
         <p:txBody>
-          <a:bodyPr wrap="none" rtlCol="0" anchor="ctr"/>
+          <a:bodyPr rtlCol="0" anchor="ctr" wrap="none"/>
           <a:lstStyle/>
           <a:p>
             <a:pPr algn="ctr"/>
@@ -5196,7 +5125,7 @@
           </a:fontRef>
         </p:style>
         <p:txBody>
-          <a:bodyPr wrap="none" rtlCol="0" anchor="ctr"/>
+          <a:bodyPr rtlCol="0" anchor="ctr" wrap="none"/>
           <a:lstStyle/>
           <a:p>
             <a:pPr algn="ctr"/>
@@ -5361,7 +5290,7 @@
 </file>
 
 <file path=ppt/slides/slide12.xml><?xml version="1.0" encoding="utf-8"?>
-<p:sld xmlns:a="http://schemas.openxmlformats.org/drawingml/2006/main" xmlns:r="http://schemas.openxmlformats.org/officeDocument/2006/relationships" xmlns:p="http://schemas.openxmlformats.org/presentationml/2006/main">
+<p:sld xmlns:a="http://schemas.openxmlformats.org/drawingml/2006/main" xmlns:p="http://schemas.openxmlformats.org/presentationml/2006/main" xmlns:r="http://schemas.openxmlformats.org/officeDocument/2006/relationships">
   <p:cSld>
     <p:bg>
       <p:bgPr>
@@ -5377,14 +5306,7 @@
         <p:cNvGrpSpPr/>
         <p:nvPr/>
       </p:nvGrpSpPr>
-      <p:grpSpPr>
-        <a:xfrm>
-          <a:off x="0" y="0"/>
-          <a:ext cx="0" cy="0"/>
-          <a:chOff x="0" y="0"/>
-          <a:chExt cx="0" cy="0"/>
-        </a:xfrm>
-      </p:grpSpPr>
+      <p:grpSpPr/>
       <p:sp>
         <p:nvSpPr>
           <p:cNvPr id="2" name="Rectangle 1"/>
@@ -5426,7 +5348,6 @@
           <a:lstStyle/>
           <a:p>
             <a:pPr algn="ctr"/>
-            <a:endParaRPr/>
           </a:p>
         </p:txBody>
       </p:sp>
@@ -5650,7 +5571,6 @@
           <a:lstStyle/>
           <a:p>
             <a:pPr algn="ctr"/>
-            <a:endParaRPr/>
           </a:p>
         </p:txBody>
       </p:sp>
@@ -5698,7 +5618,7 @@
 </file>
 
 <file path=ppt/slides/slide13.xml><?xml version="1.0" encoding="utf-8"?>
-<p:sld xmlns:a="http://schemas.openxmlformats.org/drawingml/2006/main" xmlns:r="http://schemas.openxmlformats.org/officeDocument/2006/relationships" xmlns:p="http://schemas.openxmlformats.org/presentationml/2006/main">
+<p:sld xmlns:a="http://schemas.openxmlformats.org/drawingml/2006/main" xmlns:p="http://schemas.openxmlformats.org/presentationml/2006/main" xmlns:r="http://schemas.openxmlformats.org/officeDocument/2006/relationships">
   <p:cSld>
     <p:bg>
       <p:bgPr>
@@ -5714,14 +5634,7 @@
         <p:cNvGrpSpPr/>
         <p:nvPr/>
       </p:nvGrpSpPr>
-      <p:grpSpPr>
-        <a:xfrm>
-          <a:off x="0" y="0"/>
-          <a:ext cx="0" cy="0"/>
-          <a:chOff x="0" y="0"/>
-          <a:chExt cx="0" cy="0"/>
-        </a:xfrm>
-      </p:grpSpPr>
+      <p:grpSpPr/>
       <p:sp>
         <p:nvSpPr>
           <p:cNvPr id="2" name="Rectangle 1"/>
@@ -5763,7 +5676,6 @@
           <a:lstStyle/>
           <a:p>
             <a:pPr algn="ctr"/>
-            <a:endParaRPr/>
           </a:p>
         </p:txBody>
       </p:sp>
@@ -5846,7 +5758,7 @@
         <p:spPr>
           <a:xfrm>
             <a:off x="0" y="3657600"/>
-            <a:ext cx="12191695" cy="292388"/>
+            <a:ext cx="12191695" cy="457200"/>
           </a:xfrm>
           <a:prstGeom prst="rect">
             <a:avLst/>
@@ -5861,22 +5773,13 @@
           <a:p>
             <a:pPr algn="ctr"/>
             <a:r>
-              <a:rPr lang="en-US" sz="1300" dirty="0">
+              <a:rPr sz="1300" b="0" i="0">
                 <a:solidFill>
                   <a:srgbClr val="8D99AE"/>
                 </a:solidFill>
                 <a:latin typeface="Calibri"/>
               </a:rPr>
-              <a:t>Noy Levy – David Zeff – Danielle Ab– Sagi Gutin- Shira Meriash</a:t>
-            </a:r>
-            <a:r>
-              <a:rPr sz="1300" b="0" i="0" dirty="0">
-                <a:solidFill>
-                  <a:srgbClr val="8D99AE"/>
-                </a:solidFill>
-                <a:latin typeface="Calibri"/>
-              </a:rPr>
-              <a:t>·   Data Analyst Program, Hebrew University of Jerusalem</a:t>
+              <a:t>Noy Levy, David Zeff, Danielle Ab, Sagi Gutin, Shira Meriash   ·   Data Analyst Program, Hebrew University of Jerusalem</a:t>
             </a:r>
           </a:p>
         </p:txBody>
@@ -5890,7 +5793,7 @@
 </file>
 
 <file path=ppt/slides/slide2.xml><?xml version="1.0" encoding="utf-8"?>
-<p:sld xmlns:a="http://schemas.openxmlformats.org/drawingml/2006/main" xmlns:r="http://schemas.openxmlformats.org/officeDocument/2006/relationships" xmlns:p="http://schemas.openxmlformats.org/presentationml/2006/main">
+<p:sld xmlns:a="http://schemas.openxmlformats.org/drawingml/2006/main" xmlns:p="http://schemas.openxmlformats.org/presentationml/2006/main" xmlns:r="http://schemas.openxmlformats.org/officeDocument/2006/relationships">
   <p:cSld>
     <p:spTree>
       <p:nvGrpSpPr>
@@ -5898,14 +5801,7 @@
         <p:cNvGrpSpPr/>
         <p:nvPr/>
       </p:nvGrpSpPr>
-      <p:grpSpPr>
-        <a:xfrm>
-          <a:off x="0" y="0"/>
-          <a:ext cx="0" cy="0"/>
-          <a:chOff x="0" y="0"/>
-          <a:chExt cx="0" cy="0"/>
-        </a:xfrm>
-      </p:grpSpPr>
+      <p:grpSpPr/>
       <p:sp>
         <p:nvSpPr>
           <p:cNvPr id="2" name="Rectangle 1"/>
@@ -5947,7 +5843,6 @@
           <a:lstStyle/>
           <a:p>
             <a:pPr algn="ctr"/>
-            <a:endParaRPr/>
           </a:p>
         </p:txBody>
       </p:sp>
@@ -5992,7 +5887,6 @@
           <a:lstStyle/>
           <a:p>
             <a:pPr algn="ctr"/>
-            <a:endParaRPr/>
           </a:p>
         </p:txBody>
       </p:sp>
@@ -6109,7 +6003,6 @@
           <a:lstStyle/>
           <a:p>
             <a:pPr algn="ctr"/>
-            <a:endParaRPr/>
           </a:p>
         </p:txBody>
       </p:sp>
@@ -6143,7 +6036,7 @@
                 </a:solidFill>
                 <a:latin typeface="Calibri"/>
               </a:rPr>
-              <a:t>Presenter</a:t>
+              <a:t>Presenters</a:t>
             </a:r>
           </a:p>
         </p:txBody>
@@ -6178,7 +6071,7 @@
                 </a:solidFill>
                 <a:latin typeface="Calibri"/>
               </a:rPr>
-              <a:t>David Zeff</a:t>
+              <a:t>Noy Levy, David Zeff, Danielle Ab, Sagi Gutin, Shira Meriash</a:t>
             </a:r>
           </a:p>
         </p:txBody>
@@ -6226,7 +6119,6 @@
           <a:lstStyle/>
           <a:p>
             <a:pPr algn="ctr"/>
-            <a:endParaRPr/>
           </a:p>
         </p:txBody>
       </p:sp>
@@ -6260,7 +6152,7 @@
                 </a:solidFill>
                 <a:latin typeface="Calibri"/>
               </a:rPr>
-              <a:t>Group members</a:t>
+              <a:t>Mentor</a:t>
             </a:r>
           </a:p>
         </p:txBody>
@@ -6295,7 +6187,7 @@
                 </a:solidFill>
                 <a:latin typeface="Calibri"/>
               </a:rPr>
-              <a:t>[ add teammate names ]</a:t>
+              <a:t>[ add mentor name ]</a:t>
             </a:r>
           </a:p>
         </p:txBody>
@@ -6343,7 +6235,6 @@
           <a:lstStyle/>
           <a:p>
             <a:pPr algn="ctr"/>
-            <a:endParaRPr/>
           </a:p>
         </p:txBody>
       </p:sp>
@@ -6377,7 +6268,7 @@
                 </a:solidFill>
                 <a:latin typeface="Calibri"/>
               </a:rPr>
-              <a:t>Mentor</a:t>
+              <a:t>Dataset</a:t>
             </a:r>
           </a:p>
         </p:txBody>
@@ -6412,7 +6303,7 @@
                 </a:solidFill>
                 <a:latin typeface="Calibri"/>
               </a:rPr>
-              <a:t>[ add mentor name ]</a:t>
+              <a:t>Bank Churn — 10,000 retail-banking customers</a:t>
             </a:r>
           </a:p>
         </p:txBody>
@@ -6460,7 +6351,6 @@
           <a:lstStyle/>
           <a:p>
             <a:pPr algn="ctr"/>
-            <a:endParaRPr/>
           </a:p>
         </p:txBody>
       </p:sp>
@@ -6494,7 +6384,7 @@
                 </a:solidFill>
                 <a:latin typeface="Calibri"/>
               </a:rPr>
-              <a:t>Dataset</a:t>
+              <a:t>Tools</a:t>
             </a:r>
           </a:p>
         </p:txBody>
@@ -6529,123 +6419,6 @@
                 </a:solidFill>
                 <a:latin typeface="Calibri"/>
               </a:rPr>
-              <a:t>Bank Churn — 10,000 retail-banking customers</a:t>
-            </a:r>
-          </a:p>
-        </p:txBody>
-      </p:sp>
-      <p:sp>
-        <p:nvSpPr>
-          <p:cNvPr id="18" name="Rounded Rectangle 17"/>
-          <p:cNvSpPr/>
-          <p:nvPr/>
-        </p:nvSpPr>
-        <p:spPr>
-          <a:xfrm>
-            <a:off x="822960" y="4736592"/>
-            <a:ext cx="2468880" cy="566928"/>
-          </a:xfrm>
-          <a:prstGeom prst="roundRect">
-            <a:avLst>
-              <a:gd name="adj" fmla="val 6000"/>
-            </a:avLst>
-          </a:prstGeom>
-          <a:solidFill>
-            <a:srgbClr val="1F3A5F"/>
-          </a:solidFill>
-          <a:ln>
-            <a:noFill/>
-          </a:ln>
-          <a:effectLst/>
-        </p:spPr>
-        <p:style>
-          <a:lnRef idx="1">
-            <a:schemeClr val="accent1"/>
-          </a:lnRef>
-          <a:fillRef idx="3">
-            <a:schemeClr val="accent1"/>
-          </a:fillRef>
-          <a:effectRef idx="2">
-            <a:schemeClr val="accent1"/>
-          </a:effectRef>
-          <a:fontRef idx="minor">
-            <a:schemeClr val="lt1"/>
-          </a:fontRef>
-        </p:style>
-        <p:txBody>
-          <a:bodyPr rtlCol="0" anchor="ctr"/>
-          <a:lstStyle/>
-          <a:p>
-            <a:pPr algn="ctr"/>
-            <a:endParaRPr/>
-          </a:p>
-        </p:txBody>
-      </p:sp>
-      <p:sp>
-        <p:nvSpPr>
-          <p:cNvPr id="19" name="TextBox 18"/>
-          <p:cNvSpPr txBox="1"/>
-          <p:nvPr/>
-        </p:nvSpPr>
-        <p:spPr>
-          <a:xfrm>
-            <a:off x="822960" y="4773168"/>
-            <a:ext cx="2468880" cy="502920"/>
-          </a:xfrm>
-          <a:prstGeom prst="rect">
-            <a:avLst/>
-          </a:prstGeom>
-          <a:noFill/>
-        </p:spPr>
-        <p:txBody>
-          <a:bodyPr wrap="square" anchor="ctr">
-            <a:spAutoFit/>
-          </a:bodyPr>
-          <a:lstStyle/>
-          <a:p>
-            <a:pPr algn="ctr"/>
-            <a:r>
-              <a:rPr sz="1400" b="1" i="0">
-                <a:solidFill>
-                  <a:srgbClr val="FFFFFF"/>
-                </a:solidFill>
-                <a:latin typeface="Calibri"/>
-              </a:rPr>
-              <a:t>Tools</a:t>
-            </a:r>
-          </a:p>
-        </p:txBody>
-      </p:sp>
-      <p:sp>
-        <p:nvSpPr>
-          <p:cNvPr id="20" name="TextBox 19"/>
-          <p:cNvSpPr txBox="1"/>
-          <p:nvPr/>
-        </p:nvSpPr>
-        <p:spPr>
-          <a:xfrm>
-            <a:off x="3566160" y="4773168"/>
-            <a:ext cx="7680960" cy="502920"/>
-          </a:xfrm>
-          <a:prstGeom prst="rect">
-            <a:avLst/>
-          </a:prstGeom>
-          <a:noFill/>
-        </p:spPr>
-        <p:txBody>
-          <a:bodyPr wrap="square" anchor="ctr">
-            <a:spAutoFit/>
-          </a:bodyPr>
-          <a:lstStyle/>
-          <a:p>
-            <a:pPr algn="l"/>
-            <a:r>
-              <a:rPr sz="1600" b="0" i="0">
-                <a:solidFill>
-                  <a:srgbClr val="2B2B2B"/>
-                </a:solidFill>
-                <a:latin typeface="Calibri"/>
-              </a:rPr>
               <a:t>Python (pandas) · cleaning &amp; analysis  |  Plotly · interactive dashboard  |  PowerPoint</a:t>
             </a:r>
           </a:p>
@@ -6653,7 +6426,7 @@
       </p:sp>
       <p:sp>
         <p:nvSpPr>
-          <p:cNvPr id="21" name="TextBox 20"/>
+          <p:cNvPr id="18" name="TextBox 17"/>
           <p:cNvSpPr txBox="1"/>
           <p:nvPr/>
         </p:nvSpPr>
@@ -6688,7 +6461,7 @@
       </p:sp>
       <p:sp>
         <p:nvSpPr>
-          <p:cNvPr id="22" name="TextBox 21"/>
+          <p:cNvPr id="19" name="TextBox 18"/>
           <p:cNvSpPr txBox="1"/>
           <p:nvPr/>
         </p:nvSpPr>
@@ -6730,7 +6503,7 @@
 </file>
 
 <file path=ppt/slides/slide3.xml><?xml version="1.0" encoding="utf-8"?>
-<p:sld xmlns:a="http://schemas.openxmlformats.org/drawingml/2006/main" xmlns:r="http://schemas.openxmlformats.org/officeDocument/2006/relationships" xmlns:p="http://schemas.openxmlformats.org/presentationml/2006/main">
+<p:sld xmlns:a="http://schemas.openxmlformats.org/drawingml/2006/main" xmlns:p="http://schemas.openxmlformats.org/presentationml/2006/main" xmlns:r="http://schemas.openxmlformats.org/officeDocument/2006/relationships">
   <p:cSld>
     <p:spTree>
       <p:nvGrpSpPr>
@@ -6738,14 +6511,7 @@
         <p:cNvGrpSpPr/>
         <p:nvPr/>
       </p:nvGrpSpPr>
-      <p:grpSpPr>
-        <a:xfrm>
-          <a:off x="0" y="0"/>
-          <a:ext cx="0" cy="0"/>
-          <a:chOff x="0" y="0"/>
-          <a:chExt cx="0" cy="0"/>
-        </a:xfrm>
-      </p:grpSpPr>
+      <p:grpSpPr/>
       <p:sp>
         <p:nvSpPr>
           <p:cNvPr id="2" name="Rectangle 1"/>
@@ -6787,7 +6553,6 @@
           <a:lstStyle/>
           <a:p>
             <a:pPr algn="ctr"/>
-            <a:endParaRPr/>
           </a:p>
         </p:txBody>
       </p:sp>
@@ -6832,7 +6597,6 @@
           <a:lstStyle/>
           <a:p>
             <a:pPr algn="ctr"/>
-            <a:endParaRPr/>
           </a:p>
         </p:txBody>
       </p:sp>
@@ -7122,7 +6886,6 @@
           <a:lstStyle/>
           <a:p>
             <a:pPr algn="ctr"/>
-            <a:endParaRPr/>
           </a:p>
         </p:txBody>
       </p:sp>
@@ -7229,7 +6992,7 @@
 </file>
 
 <file path=ppt/slides/slide4.xml><?xml version="1.0" encoding="utf-8"?>
-<p:sld xmlns:a="http://schemas.openxmlformats.org/drawingml/2006/main" xmlns:r="http://schemas.openxmlformats.org/officeDocument/2006/relationships" xmlns:p="http://schemas.openxmlformats.org/presentationml/2006/main">
+<p:sld xmlns:a="http://schemas.openxmlformats.org/drawingml/2006/main" xmlns:p="http://schemas.openxmlformats.org/presentationml/2006/main" xmlns:r="http://schemas.openxmlformats.org/officeDocument/2006/relationships">
   <p:cSld>
     <p:spTree>
       <p:nvGrpSpPr>
@@ -7237,14 +7000,7 @@
         <p:cNvGrpSpPr/>
         <p:nvPr/>
       </p:nvGrpSpPr>
-      <p:grpSpPr>
-        <a:xfrm>
-          <a:off x="0" y="0"/>
-          <a:ext cx="0" cy="0"/>
-          <a:chOff x="0" y="0"/>
-          <a:chExt cx="0" cy="0"/>
-        </a:xfrm>
-      </p:grpSpPr>
+      <p:grpSpPr/>
       <p:sp>
         <p:nvSpPr>
           <p:cNvPr id="2" name="Rectangle 1"/>
@@ -7286,7 +7042,6 @@
           <a:lstStyle/>
           <a:p>
             <a:pPr algn="ctr"/>
-            <a:endParaRPr/>
           </a:p>
         </p:txBody>
       </p:sp>
@@ -7331,7 +7086,6 @@
           <a:lstStyle/>
           <a:p>
             <a:pPr algn="ctr"/>
-            <a:endParaRPr/>
           </a:p>
         </p:txBody>
       </p:sp>
@@ -7448,7 +7202,6 @@
           <a:lstStyle/>
           <a:p>
             <a:pPr algn="ctr"/>
-            <a:endParaRPr/>
           </a:p>
         </p:txBody>
       </p:sp>
@@ -7493,7 +7246,6 @@
           <a:lstStyle/>
           <a:p>
             <a:pPr algn="ctr"/>
-            <a:endParaRPr/>
           </a:p>
         </p:txBody>
       </p:sp>
@@ -7647,7 +7399,6 @@
           <a:lstStyle/>
           <a:p>
             <a:pPr algn="ctr"/>
-            <a:endParaRPr/>
           </a:p>
         </p:txBody>
       </p:sp>
@@ -7692,7 +7443,6 @@
           <a:lstStyle/>
           <a:p>
             <a:pPr algn="ctr"/>
-            <a:endParaRPr/>
           </a:p>
         </p:txBody>
       </p:sp>
@@ -7846,7 +7596,6 @@
           <a:lstStyle/>
           <a:p>
             <a:pPr algn="ctr"/>
-            <a:endParaRPr/>
           </a:p>
         </p:txBody>
       </p:sp>
@@ -7891,7 +7640,6 @@
           <a:lstStyle/>
           <a:p>
             <a:pPr algn="ctr"/>
-            <a:endParaRPr/>
           </a:p>
         </p:txBody>
       </p:sp>
@@ -8045,7 +7793,6 @@
           <a:lstStyle/>
           <a:p>
             <a:pPr algn="ctr"/>
-            <a:endParaRPr/>
           </a:p>
         </p:txBody>
       </p:sp>
@@ -8090,7 +7837,6 @@
           <a:lstStyle/>
           <a:p>
             <a:pPr algn="ctr"/>
-            <a:endParaRPr/>
           </a:p>
         </p:txBody>
       </p:sp>
@@ -8244,7 +7990,6 @@
           <a:lstStyle/>
           <a:p>
             <a:pPr algn="ctr"/>
-            <a:endParaRPr/>
           </a:p>
         </p:txBody>
       </p:sp>
@@ -8289,7 +8034,6 @@
           <a:lstStyle/>
           <a:p>
             <a:pPr algn="ctr"/>
-            <a:endParaRPr/>
           </a:p>
         </p:txBody>
       </p:sp>
@@ -8683,7 +8427,7 @@
 </file>
 
 <file path=ppt/slides/slide5.xml><?xml version="1.0" encoding="utf-8"?>
-<p:sld xmlns:a="http://schemas.openxmlformats.org/drawingml/2006/main" xmlns:r="http://schemas.openxmlformats.org/officeDocument/2006/relationships" xmlns:p="http://schemas.openxmlformats.org/presentationml/2006/main">
+<p:sld xmlns:a="http://schemas.openxmlformats.org/drawingml/2006/main" xmlns:p="http://schemas.openxmlformats.org/presentationml/2006/main" xmlns:r="http://schemas.openxmlformats.org/officeDocument/2006/relationships">
   <p:cSld>
     <p:spTree>
       <p:nvGrpSpPr>
@@ -8691,14 +8435,7 @@
         <p:cNvGrpSpPr/>
         <p:nvPr/>
       </p:nvGrpSpPr>
-      <p:grpSpPr>
-        <a:xfrm>
-          <a:off x="0" y="0"/>
-          <a:ext cx="0" cy="0"/>
-          <a:chOff x="0" y="0"/>
-          <a:chExt cx="0" cy="0"/>
-        </a:xfrm>
-      </p:grpSpPr>
+      <p:grpSpPr/>
       <p:sp>
         <p:nvSpPr>
           <p:cNvPr id="2" name="Rectangle 1"/>
@@ -8740,7 +8477,6 @@
           <a:lstStyle/>
           <a:p>
             <a:pPr algn="ctr"/>
-            <a:endParaRPr/>
           </a:p>
         </p:txBody>
       </p:sp>
@@ -8785,7 +8521,6 @@
           <a:lstStyle/>
           <a:p>
             <a:pPr algn="ctr"/>
-            <a:endParaRPr/>
           </a:p>
         </p:txBody>
       </p:sp>
@@ -9110,7 +8845,6 @@
           <a:lstStyle/>
           <a:p>
             <a:pPr algn="ctr"/>
-            <a:endParaRPr/>
           </a:p>
         </p:txBody>
       </p:sp>
@@ -9155,7 +8889,6 @@
           <a:lstStyle/>
           <a:p>
             <a:pPr algn="ctr"/>
-            <a:endParaRPr/>
           </a:p>
         </p:txBody>
       </p:sp>
@@ -9253,7 +8986,6 @@
           <a:lstStyle/>
           <a:p>
             <a:pPr algn="ctr"/>
-            <a:endParaRPr/>
           </a:p>
         </p:txBody>
       </p:sp>
@@ -9721,7 +9453,7 @@
 </file>
 
 <file path=ppt/slides/slide6.xml><?xml version="1.0" encoding="utf-8"?>
-<p:sld xmlns:a="http://schemas.openxmlformats.org/drawingml/2006/main" xmlns:r="http://schemas.openxmlformats.org/officeDocument/2006/relationships" xmlns:p="http://schemas.openxmlformats.org/presentationml/2006/main">
+<p:sld xmlns:a="http://schemas.openxmlformats.org/drawingml/2006/main" xmlns:p="http://schemas.openxmlformats.org/presentationml/2006/main" xmlns:r="http://schemas.openxmlformats.org/officeDocument/2006/relationships">
   <p:cSld>
     <p:spTree>
       <p:nvGrpSpPr>
@@ -9729,14 +9461,7 @@
         <p:cNvGrpSpPr/>
         <p:nvPr/>
       </p:nvGrpSpPr>
-      <p:grpSpPr>
-        <a:xfrm>
-          <a:off x="0" y="0"/>
-          <a:ext cx="0" cy="0"/>
-          <a:chOff x="0" y="0"/>
-          <a:chExt cx="0" cy="0"/>
-        </a:xfrm>
-      </p:grpSpPr>
+      <p:grpSpPr/>
       <p:sp>
         <p:nvSpPr>
           <p:cNvPr id="2" name="Rectangle 1"/>
@@ -9778,7 +9503,6 @@
           <a:lstStyle/>
           <a:p>
             <a:pPr algn="ctr"/>
-            <a:endParaRPr/>
           </a:p>
         </p:txBody>
       </p:sp>
@@ -9823,7 +9547,6 @@
           <a:lstStyle/>
           <a:p>
             <a:pPr algn="ctr"/>
-            <a:endParaRPr/>
           </a:p>
         </p:txBody>
       </p:sp>
@@ -9942,7 +9665,6 @@
           <a:lstStyle/>
           <a:p>
             <a:pPr algn="ctr"/>
-            <a:endParaRPr/>
           </a:p>
         </p:txBody>
       </p:sp>
@@ -10049,7 +9771,7 @@
 </file>
 
 <file path=ppt/slides/slide7.xml><?xml version="1.0" encoding="utf-8"?>
-<p:sld xmlns:a="http://schemas.openxmlformats.org/drawingml/2006/main" xmlns:r="http://schemas.openxmlformats.org/officeDocument/2006/relationships" xmlns:p="http://schemas.openxmlformats.org/presentationml/2006/main">
+<p:sld xmlns:a="http://schemas.openxmlformats.org/drawingml/2006/main" xmlns:p="http://schemas.openxmlformats.org/presentationml/2006/main" xmlns:r="http://schemas.openxmlformats.org/officeDocument/2006/relationships">
   <p:cSld>
     <p:spTree>
       <p:nvGrpSpPr>
@@ -10057,14 +9779,7 @@
         <p:cNvGrpSpPr/>
         <p:nvPr/>
       </p:nvGrpSpPr>
-      <p:grpSpPr>
-        <a:xfrm>
-          <a:off x="0" y="0"/>
-          <a:ext cx="0" cy="0"/>
-          <a:chOff x="0" y="0"/>
-          <a:chExt cx="0" cy="0"/>
-        </a:xfrm>
-      </p:grpSpPr>
+      <p:grpSpPr/>
       <p:sp>
         <p:nvSpPr>
           <p:cNvPr id="2" name="Rectangle 1"/>
@@ -10106,7 +9821,6 @@
           <a:lstStyle/>
           <a:p>
             <a:pPr algn="ctr"/>
-            <a:endParaRPr/>
           </a:p>
         </p:txBody>
       </p:sp>
@@ -10151,7 +9865,6 @@
           <a:lstStyle/>
           <a:p>
             <a:pPr algn="ctr"/>
-            <a:endParaRPr/>
           </a:p>
         </p:txBody>
       </p:sp>
@@ -10270,7 +9983,6 @@
           <a:lstStyle/>
           <a:p>
             <a:pPr algn="ctr"/>
-            <a:endParaRPr/>
           </a:p>
         </p:txBody>
       </p:sp>
@@ -10512,7 +10224,6 @@
           <a:lstStyle/>
           <a:p>
             <a:pPr algn="ctr"/>
-            <a:endParaRPr/>
           </a:p>
         </p:txBody>
       </p:sp>
@@ -10557,7 +10268,6 @@
           <a:lstStyle/>
           <a:p>
             <a:pPr algn="ctr"/>
-            <a:endParaRPr/>
           </a:p>
         </p:txBody>
       </p:sp>
@@ -10691,7 +10401,7 @@
 </file>
 
 <file path=ppt/slides/slide8.xml><?xml version="1.0" encoding="utf-8"?>
-<p:sld xmlns:a="http://schemas.openxmlformats.org/drawingml/2006/main" xmlns:r="http://schemas.openxmlformats.org/officeDocument/2006/relationships" xmlns:p="http://schemas.openxmlformats.org/presentationml/2006/main">
+<p:sld xmlns:a="http://schemas.openxmlformats.org/drawingml/2006/main" xmlns:p="http://schemas.openxmlformats.org/presentationml/2006/main" xmlns:r="http://schemas.openxmlformats.org/officeDocument/2006/relationships">
   <p:cSld>
     <p:spTree>
       <p:nvGrpSpPr>
@@ -10699,14 +10409,7 @@
         <p:cNvGrpSpPr/>
         <p:nvPr/>
       </p:nvGrpSpPr>
-      <p:grpSpPr>
-        <a:xfrm>
-          <a:off x="0" y="0"/>
-          <a:ext cx="0" cy="0"/>
-          <a:chOff x="0" y="0"/>
-          <a:chExt cx="0" cy="0"/>
-        </a:xfrm>
-      </p:grpSpPr>
+      <p:grpSpPr/>
       <p:sp>
         <p:nvSpPr>
           <p:cNvPr id="2" name="Rectangle 1"/>
@@ -10748,7 +10451,6 @@
           <a:lstStyle/>
           <a:p>
             <a:pPr algn="ctr"/>
-            <a:endParaRPr/>
           </a:p>
         </p:txBody>
       </p:sp>
@@ -10793,7 +10495,6 @@
           <a:lstStyle/>
           <a:p>
             <a:pPr algn="ctr"/>
-            <a:endParaRPr/>
           </a:p>
         </p:txBody>
       </p:sp>
@@ -10912,7 +10613,6 @@
           <a:lstStyle/>
           <a:p>
             <a:pPr algn="ctr"/>
-            <a:endParaRPr/>
           </a:p>
         </p:txBody>
       </p:sp>
@@ -10985,7 +10685,6 @@
           <a:lstStyle/>
           <a:p>
             <a:pPr algn="ctr"/>
-            <a:endParaRPr/>
           </a:p>
         </p:txBody>
       </p:sp>
@@ -11056,7 +10755,6 @@
           <a:lstStyle/>
           <a:p>
             <a:pPr algn="ctr"/>
-            <a:endParaRPr/>
           </a:p>
         </p:txBody>
       </p:sp>
@@ -11101,7 +10799,6 @@
           <a:lstStyle/>
           <a:p>
             <a:pPr algn="ctr"/>
-            <a:endParaRPr/>
           </a:p>
         </p:txBody>
       </p:sp>
@@ -11235,7 +10932,7 @@
 </file>
 
 <file path=ppt/slides/slide9.xml><?xml version="1.0" encoding="utf-8"?>
-<p:sld xmlns:a="http://schemas.openxmlformats.org/drawingml/2006/main" xmlns:r="http://schemas.openxmlformats.org/officeDocument/2006/relationships" xmlns:p="http://schemas.openxmlformats.org/presentationml/2006/main">
+<p:sld xmlns:a="http://schemas.openxmlformats.org/drawingml/2006/main" xmlns:p="http://schemas.openxmlformats.org/presentationml/2006/main" xmlns:r="http://schemas.openxmlformats.org/officeDocument/2006/relationships">
   <p:cSld>
     <p:spTree>
       <p:nvGrpSpPr>
@@ -11243,14 +10940,7 @@
         <p:cNvGrpSpPr/>
         <p:nvPr/>
       </p:nvGrpSpPr>
-      <p:grpSpPr>
-        <a:xfrm>
-          <a:off x="0" y="0"/>
-          <a:ext cx="0" cy="0"/>
-          <a:chOff x="0" y="0"/>
-          <a:chExt cx="0" cy="0"/>
-        </a:xfrm>
-      </p:grpSpPr>
+      <p:grpSpPr/>
       <p:sp>
         <p:nvSpPr>
           <p:cNvPr id="2" name="Rectangle 1"/>
@@ -11292,7 +10982,6 @@
           <a:lstStyle/>
           <a:p>
             <a:pPr algn="ctr"/>
-            <a:endParaRPr/>
           </a:p>
         </p:txBody>
       </p:sp>
@@ -11337,7 +11026,6 @@
           <a:lstStyle/>
           <a:p>
             <a:pPr algn="ctr"/>
-            <a:endParaRPr/>
           </a:p>
         </p:txBody>
       </p:sp>
@@ -11456,7 +11144,6 @@
           <a:lstStyle/>
           <a:p>
             <a:pPr algn="ctr"/>
-            <a:endParaRPr/>
           </a:p>
         </p:txBody>
       </p:sp>
@@ -11529,7 +11216,6 @@
           <a:lstStyle/>
           <a:p>
             <a:pPr algn="ctr"/>
-            <a:endParaRPr/>
           </a:p>
         </p:txBody>
       </p:sp>
@@ -11600,7 +11286,6 @@
           <a:lstStyle/>
           <a:p>
             <a:pPr algn="ctr"/>
-            <a:endParaRPr/>
           </a:p>
         </p:txBody>
       </p:sp>
@@ -11645,7 +11330,6 @@
           <a:lstStyle/>
           <a:p>
             <a:pPr algn="ctr"/>
-            <a:endParaRPr/>
           </a:p>
         </p:txBody>
       </p:sp>

--- a/deliverables/Bank_Churn_Analysis.pptx
+++ b/deliverables/Bank_Churn_Analysis.pptx
@@ -6187,7 +6187,7 @@
                 </a:solidFill>
                 <a:latin typeface="Calibri"/>
               </a:rPr>
-              <a:t>[ add mentor name ]</a:t>
+              <a:t>Tall Mizrachi</a:t>
             </a:r>
           </a:p>
         </p:txBody>

--- a/deliverables/Bank_Churn_Analysis.pptx
+++ b/deliverables/Bank_Churn_Analysis.pptx
@@ -6187,7 +6187,7 @@
                 </a:solidFill>
                 <a:latin typeface="Calibri"/>
               </a:rPr>
-              <a:t>Tall Mizrachi</a:t>
+              <a:t>Tal Mizrachi</a:t>
             </a:r>
           </a:p>
         </p:txBody>

--- a/deliverables/Bank_Churn_Analysis.pptx
+++ b/deliverables/Bank_Churn_Analysis.pptx
@@ -7161,14 +7161,49 @@
       </p:sp>
       <p:sp>
         <p:nvSpPr>
-          <p:cNvPr id="6" name="Rounded Rectangle 5"/>
+          <p:cNvPr id="6" name="TextBox 5"/>
+          <p:cNvSpPr txBox="1"/>
+          <p:nvPr/>
+        </p:nvSpPr>
+        <p:spPr>
+          <a:xfrm>
+            <a:off x="566928" y="1225296"/>
+            <a:ext cx="10972800" cy="274320"/>
+          </a:xfrm>
+          <a:prstGeom prst="rect">
+            <a:avLst/>
+          </a:prstGeom>
+          <a:noFill/>
+        </p:spPr>
+        <p:txBody>
+          <a:bodyPr wrap="square" anchor="t">
+            <a:spAutoFit/>
+          </a:bodyPr>
+          <a:lstStyle/>
+          <a:p>
+            <a:pPr algn="l"/>
+            <a:r>
+              <a:rPr sz="1200" b="1" i="0">
+                <a:solidFill>
+                  <a:srgbClr val="2A9D8F"/>
+                </a:solidFill>
+                <a:latin typeface="Calibri"/>
+              </a:rPr>
+              <a:t>SUCCESS METRICS — CURRENT vs TARGET</a:t>
+            </a:r>
+          </a:p>
+        </p:txBody>
+      </p:sp>
+      <p:sp>
+        <p:nvSpPr>
+          <p:cNvPr id="7" name="Rounded Rectangle 6"/>
           <p:cNvSpPr/>
           <p:nvPr/>
         </p:nvSpPr>
         <p:spPr>
           <a:xfrm>
-            <a:off x="566928" y="1508760"/>
-            <a:ext cx="2139696" cy="1463040"/>
+            <a:off x="566928" y="1481328"/>
+            <a:ext cx="2615184" cy="1371600"/>
           </a:xfrm>
           <a:prstGeom prst="roundRect">
             <a:avLst>
@@ -7207,14 +7242,14 @@
       </p:sp>
       <p:sp>
         <p:nvSpPr>
-          <p:cNvPr id="7" name="Rectangle 6"/>
+          <p:cNvPr id="8" name="Rectangle 7"/>
           <p:cNvSpPr/>
           <p:nvPr/>
         </p:nvSpPr>
         <p:spPr>
           <a:xfrm>
-            <a:off x="566928" y="1508760"/>
-            <a:ext cx="2139696" cy="82296"/>
+            <a:off x="566928" y="1481328"/>
+            <a:ext cx="2615184" cy="82296"/>
           </a:xfrm>
           <a:prstGeom prst="rect">
             <a:avLst/>
@@ -7251,14 +7286,14 @@
       </p:sp>
       <p:sp>
         <p:nvSpPr>
-          <p:cNvPr id="8" name="TextBox 7"/>
-          <p:cNvSpPr txBox="1"/>
-          <p:nvPr/>
-        </p:nvSpPr>
-        <p:spPr>
-          <a:xfrm>
-            <a:off x="676656" y="1709928"/>
-            <a:ext cx="1920239" cy="502920"/>
+          <p:cNvPr id="9" name="TextBox 8"/>
+          <p:cNvSpPr txBox="1"/>
+          <p:nvPr/>
+        </p:nvSpPr>
+        <p:spPr>
+          <a:xfrm>
+            <a:off x="676656" y="1682496"/>
+            <a:ext cx="2395728" cy="502920"/>
           </a:xfrm>
           <a:prstGeom prst="rect">
             <a:avLst/>
@@ -7286,14 +7321,14 @@
       </p:sp>
       <p:sp>
         <p:nvSpPr>
-          <p:cNvPr id="9" name="TextBox 8"/>
-          <p:cNvSpPr txBox="1"/>
-          <p:nvPr/>
-        </p:nvSpPr>
-        <p:spPr>
-          <a:xfrm>
-            <a:off x="658368" y="2221991"/>
-            <a:ext cx="1956815" cy="274320"/>
+          <p:cNvPr id="10" name="TextBox 9"/>
+          <p:cNvSpPr txBox="1"/>
+          <p:nvPr/>
+        </p:nvSpPr>
+        <p:spPr>
+          <a:xfrm>
+            <a:off x="658368" y="2194560"/>
+            <a:ext cx="2432303" cy="274320"/>
           </a:xfrm>
           <a:prstGeom prst="rect">
             <a:avLst/>
@@ -7321,14 +7356,14 @@
       </p:sp>
       <p:sp>
         <p:nvSpPr>
-          <p:cNvPr id="10" name="TextBox 9"/>
-          <p:cNvSpPr txBox="1"/>
-          <p:nvPr/>
-        </p:nvSpPr>
-        <p:spPr>
-          <a:xfrm>
-            <a:off x="658368" y="2478024"/>
-            <a:ext cx="1956815" cy="365760"/>
+          <p:cNvPr id="11" name="TextBox 10"/>
+          <p:cNvSpPr txBox="1"/>
+          <p:nvPr/>
+        </p:nvSpPr>
+        <p:spPr>
+          <a:xfrm>
+            <a:off x="658368" y="2450592"/>
+            <a:ext cx="2432303" cy="365760"/>
           </a:xfrm>
           <a:prstGeom prst="rect">
             <a:avLst/>
@@ -7349,21 +7384,21 @@
                 </a:solidFill>
                 <a:latin typeface="Calibri"/>
               </a:rPr>
-              <a:t>PRIMARY · target ≤ 15%</a:t>
-            </a:r>
-          </a:p>
-        </p:txBody>
-      </p:sp>
-      <p:sp>
-        <p:nvSpPr>
-          <p:cNvPr id="11" name="Rounded Rectangle 10"/>
+              <a:t>target ≤ 15%</a:t>
+            </a:r>
+          </a:p>
+        </p:txBody>
+      </p:sp>
+      <p:sp>
+        <p:nvSpPr>
+          <p:cNvPr id="12" name="Rounded Rectangle 11"/>
           <p:cNvSpPr/>
           <p:nvPr/>
         </p:nvSpPr>
         <p:spPr>
           <a:xfrm>
-            <a:off x="2871216" y="1508760"/>
-            <a:ext cx="2139696" cy="1463040"/>
+            <a:off x="3383280" y="1481328"/>
+            <a:ext cx="2615184" cy="1371600"/>
           </a:xfrm>
           <a:prstGeom prst="roundRect">
             <a:avLst>
@@ -7404,14 +7439,14 @@
       </p:sp>
       <p:sp>
         <p:nvSpPr>
-          <p:cNvPr id="12" name="Rectangle 11"/>
+          <p:cNvPr id="13" name="Rectangle 12"/>
           <p:cNvSpPr/>
           <p:nvPr/>
         </p:nvSpPr>
         <p:spPr>
           <a:xfrm>
-            <a:off x="2871216" y="1508760"/>
-            <a:ext cx="2139696" cy="82296"/>
+            <a:off x="3383280" y="1481328"/>
+            <a:ext cx="2615184" cy="82296"/>
           </a:xfrm>
           <a:prstGeom prst="rect">
             <a:avLst/>
@@ -7448,14 +7483,14 @@
       </p:sp>
       <p:sp>
         <p:nvSpPr>
-          <p:cNvPr id="13" name="TextBox 12"/>
-          <p:cNvSpPr txBox="1"/>
-          <p:nvPr/>
-        </p:nvSpPr>
-        <p:spPr>
-          <a:xfrm>
-            <a:off x="2980944" y="1709928"/>
-            <a:ext cx="1920239" cy="502920"/>
+          <p:cNvPr id="14" name="TextBox 13"/>
+          <p:cNvSpPr txBox="1"/>
+          <p:nvPr/>
+        </p:nvSpPr>
+        <p:spPr>
+          <a:xfrm>
+            <a:off x="3493008" y="1682496"/>
+            <a:ext cx="2395728" cy="502920"/>
           </a:xfrm>
           <a:prstGeom prst="rect">
             <a:avLst/>
@@ -7483,14 +7518,14 @@
       </p:sp>
       <p:sp>
         <p:nvSpPr>
-          <p:cNvPr id="14" name="TextBox 13"/>
-          <p:cNvSpPr txBox="1"/>
-          <p:nvPr/>
-        </p:nvSpPr>
-        <p:spPr>
-          <a:xfrm>
-            <a:off x="2962656" y="2221991"/>
-            <a:ext cx="1956815" cy="274320"/>
+          <p:cNvPr id="15" name="TextBox 14"/>
+          <p:cNvSpPr txBox="1"/>
+          <p:nvPr/>
+        </p:nvSpPr>
+        <p:spPr>
+          <a:xfrm>
+            <a:off x="3474720" y="2194560"/>
+            <a:ext cx="2432303" cy="274320"/>
           </a:xfrm>
           <a:prstGeom prst="rect">
             <a:avLst/>
@@ -7518,14 +7553,14 @@
       </p:sp>
       <p:sp>
         <p:nvSpPr>
-          <p:cNvPr id="15" name="TextBox 14"/>
-          <p:cNvSpPr txBox="1"/>
-          <p:nvPr/>
-        </p:nvSpPr>
-        <p:spPr>
-          <a:xfrm>
-            <a:off x="2962656" y="2478024"/>
-            <a:ext cx="1956815" cy="365760"/>
+          <p:cNvPr id="16" name="TextBox 15"/>
+          <p:cNvSpPr txBox="1"/>
+          <p:nvPr/>
+        </p:nvSpPr>
+        <p:spPr>
+          <a:xfrm>
+            <a:off x="3474720" y="2450592"/>
+            <a:ext cx="2432303" cy="365760"/>
           </a:xfrm>
           <a:prstGeom prst="rect">
             <a:avLst/>
@@ -7546,21 +7581,21 @@
                 </a:solidFill>
                 <a:latin typeface="Calibri"/>
               </a:rPr>
-              <a:t>keep &gt; 85%</a:t>
-            </a:r>
-          </a:p>
-        </p:txBody>
-      </p:sp>
-      <p:sp>
-        <p:nvSpPr>
-          <p:cNvPr id="16" name="Rounded Rectangle 15"/>
+              <a:t>target ≥ 85%</a:t>
+            </a:r>
+          </a:p>
+        </p:txBody>
+      </p:sp>
+      <p:sp>
+        <p:nvSpPr>
+          <p:cNvPr id="17" name="Rounded Rectangle 16"/>
           <p:cNvSpPr/>
           <p:nvPr/>
         </p:nvSpPr>
         <p:spPr>
           <a:xfrm>
-            <a:off x="5175504" y="1508760"/>
-            <a:ext cx="2139696" cy="1463040"/>
+            <a:off x="6199632" y="1481328"/>
+            <a:ext cx="2615184" cy="1371600"/>
           </a:xfrm>
           <a:prstGeom prst="roundRect">
             <a:avLst>
@@ -7601,20 +7636,20 @@
       </p:sp>
       <p:sp>
         <p:nvSpPr>
-          <p:cNvPr id="17" name="Rectangle 16"/>
+          <p:cNvPr id="18" name="Rectangle 17"/>
           <p:cNvSpPr/>
           <p:nvPr/>
         </p:nvSpPr>
         <p:spPr>
           <a:xfrm>
-            <a:off x="5175504" y="1508760"/>
-            <a:ext cx="2139696" cy="82296"/>
+            <a:off x="6199632" y="1481328"/>
+            <a:ext cx="2615184" cy="82296"/>
           </a:xfrm>
           <a:prstGeom prst="rect">
             <a:avLst/>
           </a:prstGeom>
           <a:solidFill>
-            <a:srgbClr val="E63946"/>
+            <a:srgbClr val="1F3A5F"/>
           </a:solidFill>
           <a:ln>
             <a:noFill/>
@@ -7645,14 +7680,14 @@
       </p:sp>
       <p:sp>
         <p:nvSpPr>
-          <p:cNvPr id="18" name="TextBox 17"/>
-          <p:cNvSpPr txBox="1"/>
-          <p:nvPr/>
-        </p:nvSpPr>
-        <p:spPr>
-          <a:xfrm>
-            <a:off x="5285232" y="1709928"/>
-            <a:ext cx="1920239" cy="502920"/>
+          <p:cNvPr id="19" name="TextBox 18"/>
+          <p:cNvSpPr txBox="1"/>
+          <p:nvPr/>
+        </p:nvSpPr>
+        <p:spPr>
+          <a:xfrm>
+            <a:off x="6309360" y="1682496"/>
+            <a:ext cx="2395728" cy="502920"/>
           </a:xfrm>
           <a:prstGeom prst="rect">
             <a:avLst/>
@@ -7669,25 +7704,25 @@
             <a:r>
               <a:rPr sz="2600" b="1" i="0">
                 <a:solidFill>
-                  <a:srgbClr val="E63946"/>
-                </a:solidFill>
-                <a:latin typeface="Calibri"/>
-              </a:rPr>
-              <a:t>€186M</a:t>
-            </a:r>
-          </a:p>
-        </p:txBody>
-      </p:sp>
-      <p:sp>
-        <p:nvSpPr>
-          <p:cNvPr id="19" name="TextBox 18"/>
-          <p:cNvSpPr txBox="1"/>
-          <p:nvPr/>
-        </p:nvSpPr>
-        <p:spPr>
-          <a:xfrm>
-            <a:off x="5266944" y="2221991"/>
-            <a:ext cx="1956815" cy="274320"/>
+                  <a:srgbClr val="1F3A5F"/>
+                </a:solidFill>
+                <a:latin typeface="Calibri"/>
+              </a:rPr>
+              <a:t>52%</a:t>
+            </a:r>
+          </a:p>
+        </p:txBody>
+      </p:sp>
+      <p:sp>
+        <p:nvSpPr>
+          <p:cNvPr id="20" name="TextBox 19"/>
+          <p:cNvSpPr txBox="1"/>
+          <p:nvPr/>
+        </p:nvSpPr>
+        <p:spPr>
+          <a:xfrm>
+            <a:off x="6291072" y="2194560"/>
+            <a:ext cx="2432303" cy="274320"/>
           </a:xfrm>
           <a:prstGeom prst="rect">
             <a:avLst/>
@@ -7708,21 +7743,21 @@
                 </a:solidFill>
                 <a:latin typeface="Calibri"/>
               </a:rPr>
-              <a:t>BALANCE AT RISK</a:t>
-            </a:r>
-          </a:p>
-        </p:txBody>
-      </p:sp>
-      <p:sp>
-        <p:nvSpPr>
-          <p:cNvPr id="20" name="TextBox 19"/>
-          <p:cNvSpPr txBox="1"/>
-          <p:nvPr/>
-        </p:nvSpPr>
-        <p:spPr>
-          <a:xfrm>
-            <a:off x="5266944" y="2478024"/>
-            <a:ext cx="1956815" cy="365760"/>
+              <a:t>ACTIVE MEMBERS</a:t>
+            </a:r>
+          </a:p>
+        </p:txBody>
+      </p:sp>
+      <p:sp>
+        <p:nvSpPr>
+          <p:cNvPr id="21" name="TextBox 20"/>
+          <p:cNvSpPr txBox="1"/>
+          <p:nvPr/>
+        </p:nvSpPr>
+        <p:spPr>
+          <a:xfrm>
+            <a:off x="6291072" y="2450592"/>
+            <a:ext cx="2432303" cy="365760"/>
           </a:xfrm>
           <a:prstGeom prst="rect">
             <a:avLst/>
@@ -7743,21 +7778,21 @@
                 </a:solidFill>
                 <a:latin typeface="Calibri"/>
               </a:rPr>
-              <a:t>24% of deposits</a:t>
-            </a:r>
-          </a:p>
-        </p:txBody>
-      </p:sp>
-      <p:sp>
-        <p:nvSpPr>
-          <p:cNvPr id="21" name="Rounded Rectangle 20"/>
+              <a:t>target ≥ 60%</a:t>
+            </a:r>
+          </a:p>
+        </p:txBody>
+      </p:sp>
+      <p:sp>
+        <p:nvSpPr>
+          <p:cNvPr id="22" name="Rounded Rectangle 21"/>
           <p:cNvSpPr/>
           <p:nvPr/>
         </p:nvSpPr>
         <p:spPr>
           <a:xfrm>
-            <a:off x="7479792" y="1508760"/>
-            <a:ext cx="2139696" cy="1463040"/>
+            <a:off x="9015984" y="1481328"/>
+            <a:ext cx="2615184" cy="1371600"/>
           </a:xfrm>
           <a:prstGeom prst="roundRect">
             <a:avLst>
@@ -7798,14 +7833,14 @@
       </p:sp>
       <p:sp>
         <p:nvSpPr>
-          <p:cNvPr id="22" name="Rectangle 21"/>
+          <p:cNvPr id="23" name="Rectangle 22"/>
           <p:cNvSpPr/>
           <p:nvPr/>
         </p:nvSpPr>
         <p:spPr>
           <a:xfrm>
-            <a:off x="7479792" y="1508760"/>
-            <a:ext cx="2139696" cy="82296"/>
+            <a:off x="9015984" y="1481328"/>
+            <a:ext cx="2615184" cy="82296"/>
           </a:xfrm>
           <a:prstGeom prst="rect">
             <a:avLst/>
@@ -7842,14 +7877,14 @@
       </p:sp>
       <p:sp>
         <p:nvSpPr>
-          <p:cNvPr id="23" name="TextBox 22"/>
-          <p:cNvSpPr txBox="1"/>
-          <p:nvPr/>
-        </p:nvSpPr>
-        <p:spPr>
-          <a:xfrm>
-            <a:off x="7589519" y="1709928"/>
-            <a:ext cx="1920239" cy="502920"/>
+          <p:cNvPr id="24" name="TextBox 23"/>
+          <p:cNvSpPr txBox="1"/>
+          <p:nvPr/>
+        </p:nvSpPr>
+        <p:spPr>
+          <a:xfrm>
+            <a:off x="9125711" y="1682496"/>
+            <a:ext cx="2395728" cy="502920"/>
           </a:xfrm>
           <a:prstGeom prst="rect">
             <a:avLst/>
@@ -7870,21 +7905,21 @@
                 </a:solidFill>
                 <a:latin typeface="Calibri"/>
               </a:rPr>
-              <a:t>52%</a:t>
-            </a:r>
-          </a:p>
-        </p:txBody>
-      </p:sp>
-      <p:sp>
-        <p:nvSpPr>
-          <p:cNvPr id="24" name="TextBox 23"/>
-          <p:cNvSpPr txBox="1"/>
-          <p:nvPr/>
-        </p:nvSpPr>
-        <p:spPr>
-          <a:xfrm>
-            <a:off x="7571231" y="2221991"/>
-            <a:ext cx="1956815" cy="274320"/>
+              <a:t>49%</a:t>
+            </a:r>
+          </a:p>
+        </p:txBody>
+      </p:sp>
+      <p:sp>
+        <p:nvSpPr>
+          <p:cNvPr id="25" name="TextBox 24"/>
+          <p:cNvSpPr txBox="1"/>
+          <p:nvPr/>
+        </p:nvSpPr>
+        <p:spPr>
+          <a:xfrm>
+            <a:off x="9107424" y="2194560"/>
+            <a:ext cx="2432303" cy="274320"/>
           </a:xfrm>
           <a:prstGeom prst="rect">
             <a:avLst/>
@@ -7905,21 +7940,21 @@
                 </a:solidFill>
                 <a:latin typeface="Calibri"/>
               </a:rPr>
-              <a:t>ACTIVE-MEMBER RATE</a:t>
-            </a:r>
-          </a:p>
-        </p:txBody>
-      </p:sp>
-      <p:sp>
-        <p:nvSpPr>
-          <p:cNvPr id="25" name="TextBox 24"/>
-          <p:cNvSpPr txBox="1"/>
-          <p:nvPr/>
-        </p:nvSpPr>
-        <p:spPr>
-          <a:xfrm>
-            <a:off x="7571231" y="2478024"/>
-            <a:ext cx="1956815" cy="365760"/>
+              <a:t>CROSS-SELL (2+ PRODUCTS)</a:t>
+            </a:r>
+          </a:p>
+        </p:txBody>
+      </p:sp>
+      <p:sp>
+        <p:nvSpPr>
+          <p:cNvPr id="26" name="TextBox 25"/>
+          <p:cNvSpPr txBox="1"/>
+          <p:nvPr/>
+        </p:nvSpPr>
+        <p:spPr>
+          <a:xfrm>
+            <a:off x="9107424" y="2450592"/>
+            <a:ext cx="2432303" cy="365760"/>
           </a:xfrm>
           <a:prstGeom prst="rect">
             <a:avLst/>
@@ -7940,21 +7975,56 @@
                 </a:solidFill>
                 <a:latin typeface="Calibri"/>
               </a:rPr>
-              <a:t>engagement lever</a:t>
-            </a:r>
-          </a:p>
-        </p:txBody>
-      </p:sp>
-      <p:sp>
-        <p:nvSpPr>
-          <p:cNvPr id="26" name="Rounded Rectangle 25"/>
+              <a:t>target ≥ 60%</a:t>
+            </a:r>
+          </a:p>
+        </p:txBody>
+      </p:sp>
+      <p:sp>
+        <p:nvSpPr>
+          <p:cNvPr id="27" name="TextBox 26"/>
+          <p:cNvSpPr txBox="1"/>
+          <p:nvPr/>
+        </p:nvSpPr>
+        <p:spPr>
+          <a:xfrm>
+            <a:off x="566928" y="3090672"/>
+            <a:ext cx="10972800" cy="274320"/>
+          </a:xfrm>
+          <a:prstGeom prst="rect">
+            <a:avLst/>
+          </a:prstGeom>
+          <a:noFill/>
+        </p:spPr>
+        <p:txBody>
+          <a:bodyPr wrap="square" anchor="t">
+            <a:spAutoFit/>
+          </a:bodyPr>
+          <a:lstStyle/>
+          <a:p>
+            <a:pPr algn="l"/>
+            <a:r>
+              <a:rPr sz="1200" b="1" i="0">
+                <a:solidFill>
+                  <a:srgbClr val="2A9D8F"/>
+                </a:solidFill>
+                <a:latin typeface="Calibri"/>
+              </a:rPr>
+              <a:t>DEPOSITS, VALUE &amp; REVENUE</a:t>
+            </a:r>
+          </a:p>
+        </p:txBody>
+      </p:sp>
+      <p:sp>
+        <p:nvSpPr>
+          <p:cNvPr id="28" name="Rounded Rectangle 27"/>
           <p:cNvSpPr/>
           <p:nvPr/>
         </p:nvSpPr>
         <p:spPr>
           <a:xfrm>
-            <a:off x="9784080" y="1508760"/>
-            <a:ext cx="2139696" cy="1463040"/>
+            <a:off x="566928" y="3346704"/>
+            <a:ext cx="2615184" cy="1371600"/>
           </a:xfrm>
           <a:prstGeom prst="roundRect">
             <a:avLst>
@@ -7995,14 +8065,14 @@
       </p:sp>
       <p:sp>
         <p:nvSpPr>
-          <p:cNvPr id="27" name="Rectangle 26"/>
+          <p:cNvPr id="29" name="Rectangle 28"/>
           <p:cNvSpPr/>
           <p:nvPr/>
         </p:nvSpPr>
         <p:spPr>
           <a:xfrm>
-            <a:off x="9784080" y="1508760"/>
-            <a:ext cx="2139696" cy="82296"/>
+            <a:off x="566928" y="3346704"/>
+            <a:ext cx="2615184" cy="82296"/>
           </a:xfrm>
           <a:prstGeom prst="rect">
             <a:avLst/>
@@ -8039,14 +8109,14 @@
       </p:sp>
       <p:sp>
         <p:nvSpPr>
-          <p:cNvPr id="28" name="TextBox 27"/>
-          <p:cNvSpPr txBox="1"/>
-          <p:nvPr/>
-        </p:nvSpPr>
-        <p:spPr>
-          <a:xfrm>
-            <a:off x="9893807" y="1709928"/>
-            <a:ext cx="1920239" cy="502920"/>
+          <p:cNvPr id="30" name="TextBox 29"/>
+          <p:cNvSpPr txBox="1"/>
+          <p:nvPr/>
+        </p:nvSpPr>
+        <p:spPr>
+          <a:xfrm>
+            <a:off x="676656" y="3547872"/>
+            <a:ext cx="2395728" cy="502920"/>
           </a:xfrm>
           <a:prstGeom prst="rect">
             <a:avLst/>
@@ -8067,21 +8137,21 @@
                 </a:solidFill>
                 <a:latin typeface="Calibri"/>
               </a:rPr>
-              <a:t>1.53</a:t>
-            </a:r>
-          </a:p>
-        </p:txBody>
-      </p:sp>
-      <p:sp>
-        <p:nvSpPr>
-          <p:cNvPr id="29" name="TextBox 28"/>
-          <p:cNvSpPr txBox="1"/>
-          <p:nvPr/>
-        </p:nvSpPr>
-        <p:spPr>
-          <a:xfrm>
-            <a:off x="9875519" y="2221991"/>
-            <a:ext cx="1956815" cy="274320"/>
+              <a:t>€765M</a:t>
+            </a:r>
+          </a:p>
+        </p:txBody>
+      </p:sp>
+      <p:sp>
+        <p:nvSpPr>
+          <p:cNvPr id="31" name="TextBox 30"/>
+          <p:cNvSpPr txBox="1"/>
+          <p:nvPr/>
+        </p:nvSpPr>
+        <p:spPr>
+          <a:xfrm>
+            <a:off x="658368" y="4059936"/>
+            <a:ext cx="2432303" cy="274320"/>
           </a:xfrm>
           <a:prstGeom prst="rect">
             <a:avLst/>
@@ -8102,21 +8172,21 @@
                 </a:solidFill>
                 <a:latin typeface="Calibri"/>
               </a:rPr>
-              <a:t>PRODUCTS / CUSTOMER</a:t>
-            </a:r>
-          </a:p>
-        </p:txBody>
-      </p:sp>
-      <p:sp>
-        <p:nvSpPr>
-          <p:cNvPr id="30" name="TextBox 29"/>
-          <p:cNvSpPr txBox="1"/>
-          <p:nvPr/>
-        </p:nvSpPr>
-        <p:spPr>
-          <a:xfrm>
-            <a:off x="9875519" y="2478024"/>
-            <a:ext cx="1956815" cy="365760"/>
+              <a:t>DEPOSITS UNDER MGMT</a:t>
+            </a:r>
+          </a:p>
+        </p:txBody>
+      </p:sp>
+      <p:sp>
+        <p:nvSpPr>
+          <p:cNvPr id="32" name="TextBox 31"/>
+          <p:cNvSpPr txBox="1"/>
+          <p:nvPr/>
+        </p:nvSpPr>
+        <p:spPr>
+          <a:xfrm>
+            <a:off x="658368" y="4315968"/>
+            <a:ext cx="2432303" cy="365760"/>
           </a:xfrm>
           <a:prstGeom prst="rect">
             <a:avLst/>
@@ -8137,21 +8207,113 @@
                 </a:solidFill>
                 <a:latin typeface="Calibri"/>
               </a:rPr>
-              <a:t>51% single-product</a:t>
-            </a:r>
-          </a:p>
-        </p:txBody>
-      </p:sp>
-      <p:sp>
-        <p:nvSpPr>
-          <p:cNvPr id="31" name="TextBox 30"/>
-          <p:cNvSpPr txBox="1"/>
-          <p:nvPr/>
-        </p:nvSpPr>
-        <p:spPr>
-          <a:xfrm>
-            <a:off x="566928" y="3383280"/>
-            <a:ext cx="11064240" cy="2560320"/>
+              <a:t>total deposit book</a:t>
+            </a:r>
+          </a:p>
+        </p:txBody>
+      </p:sp>
+      <p:sp>
+        <p:nvSpPr>
+          <p:cNvPr id="33" name="Rounded Rectangle 32"/>
+          <p:cNvSpPr/>
+          <p:nvPr/>
+        </p:nvSpPr>
+        <p:spPr>
+          <a:xfrm>
+            <a:off x="3383280" y="3346704"/>
+            <a:ext cx="2615184" cy="1371600"/>
+          </a:xfrm>
+          <a:prstGeom prst="roundRect">
+            <a:avLst>
+              <a:gd name="adj" fmla="val 6000"/>
+            </a:avLst>
+          </a:prstGeom>
+          <a:solidFill>
+            <a:srgbClr val="FFFFFF"/>
+          </a:solidFill>
+          <a:ln w="12700">
+            <a:solidFill>
+              <a:srgbClr val="EEF2F7"/>
+            </a:solidFill>
+          </a:ln>
+          <a:effectLst/>
+        </p:spPr>
+        <p:style>
+          <a:lnRef idx="1">
+            <a:schemeClr val="accent1"/>
+          </a:lnRef>
+          <a:fillRef idx="3">
+            <a:schemeClr val="accent1"/>
+          </a:fillRef>
+          <a:effectRef idx="2">
+            <a:schemeClr val="accent1"/>
+          </a:effectRef>
+          <a:fontRef idx="minor">
+            <a:schemeClr val="lt1"/>
+          </a:fontRef>
+        </p:style>
+        <p:txBody>
+          <a:bodyPr rtlCol="0" anchor="ctr"/>
+          <a:lstStyle/>
+          <a:p>
+            <a:pPr algn="ctr"/>
+          </a:p>
+        </p:txBody>
+      </p:sp>
+      <p:sp>
+        <p:nvSpPr>
+          <p:cNvPr id="34" name="Rectangle 33"/>
+          <p:cNvSpPr/>
+          <p:nvPr/>
+        </p:nvSpPr>
+        <p:spPr>
+          <a:xfrm>
+            <a:off x="3383280" y="3346704"/>
+            <a:ext cx="2615184" cy="82296"/>
+          </a:xfrm>
+          <a:prstGeom prst="rect">
+            <a:avLst/>
+          </a:prstGeom>
+          <a:solidFill>
+            <a:srgbClr val="1F3A5F"/>
+          </a:solidFill>
+          <a:ln>
+            <a:noFill/>
+          </a:ln>
+          <a:effectLst/>
+        </p:spPr>
+        <p:style>
+          <a:lnRef idx="1">
+            <a:schemeClr val="accent1"/>
+          </a:lnRef>
+          <a:fillRef idx="3">
+            <a:schemeClr val="accent1"/>
+          </a:fillRef>
+          <a:effectRef idx="2">
+            <a:schemeClr val="accent1"/>
+          </a:effectRef>
+          <a:fontRef idx="minor">
+            <a:schemeClr val="lt1"/>
+          </a:fontRef>
+        </p:style>
+        <p:txBody>
+          <a:bodyPr rtlCol="0" anchor="ctr"/>
+          <a:lstStyle/>
+          <a:p>
+            <a:pPr algn="ctr"/>
+          </a:p>
+        </p:txBody>
+      </p:sp>
+      <p:sp>
+        <p:nvSpPr>
+          <p:cNvPr id="35" name="TextBox 34"/>
+          <p:cNvSpPr txBox="1"/>
+          <p:nvPr/>
+        </p:nvSpPr>
+        <p:spPr>
+          <a:xfrm>
+            <a:off x="3493008" y="3547872"/>
+            <a:ext cx="2395728" cy="502920"/>
           </a:xfrm>
           <a:prstGeom prst="rect">
             <a:avLst/>
@@ -8164,193 +8326,592 @@
           </a:bodyPr>
           <a:lstStyle/>
           <a:p>
+            <a:pPr algn="ctr"/>
+            <a:r>
+              <a:rPr sz="2600" b="1" i="0">
+                <a:solidFill>
+                  <a:srgbClr val="1F3A5F"/>
+                </a:solidFill>
+                <a:latin typeface="Calibri"/>
+              </a:rPr>
+              <a:t>€76K</a:t>
+            </a:r>
+          </a:p>
+        </p:txBody>
+      </p:sp>
+      <p:sp>
+        <p:nvSpPr>
+          <p:cNvPr id="36" name="TextBox 35"/>
+          <p:cNvSpPr txBox="1"/>
+          <p:nvPr/>
+        </p:nvSpPr>
+        <p:spPr>
+          <a:xfrm>
+            <a:off x="3474720" y="4059936"/>
+            <a:ext cx="2432303" cy="274320"/>
+          </a:xfrm>
+          <a:prstGeom prst="rect">
+            <a:avLst/>
+          </a:prstGeom>
+          <a:noFill/>
+        </p:spPr>
+        <p:txBody>
+          <a:bodyPr wrap="square" anchor="t">
+            <a:spAutoFit/>
+          </a:bodyPr>
+          <a:lstStyle/>
+          <a:p>
+            <a:pPr algn="ctr"/>
+            <a:r>
+              <a:rPr sz="1050" b="1" i="0">
+                <a:solidFill>
+                  <a:srgbClr val="1F3A5F"/>
+                </a:solidFill>
+                <a:latin typeface="Calibri"/>
+              </a:rPr>
+              <a:t>AVG BALANCE / CUSTOMER</a:t>
+            </a:r>
+          </a:p>
+        </p:txBody>
+      </p:sp>
+      <p:sp>
+        <p:nvSpPr>
+          <p:cNvPr id="37" name="TextBox 36"/>
+          <p:cNvSpPr txBox="1"/>
+          <p:nvPr/>
+        </p:nvSpPr>
+        <p:spPr>
+          <a:xfrm>
+            <a:off x="3474720" y="4315968"/>
+            <a:ext cx="2432303" cy="365760"/>
+          </a:xfrm>
+          <a:prstGeom prst="rect">
+            <a:avLst/>
+          </a:prstGeom>
+          <a:noFill/>
+        </p:spPr>
+        <p:txBody>
+          <a:bodyPr wrap="square" anchor="t">
+            <a:spAutoFit/>
+          </a:bodyPr>
+          <a:lstStyle/>
+          <a:p>
+            <a:pPr algn="ctr"/>
+            <a:r>
+              <a:rPr sz="900" b="0" i="0">
+                <a:solidFill>
+                  <a:srgbClr val="8D99AE"/>
+                </a:solidFill>
+                <a:latin typeface="Calibri"/>
+              </a:rPr>
+              <a:t>per customer</a:t>
+            </a:r>
+          </a:p>
+        </p:txBody>
+      </p:sp>
+      <p:sp>
+        <p:nvSpPr>
+          <p:cNvPr id="38" name="Rounded Rectangle 37"/>
+          <p:cNvSpPr/>
+          <p:nvPr/>
+        </p:nvSpPr>
+        <p:spPr>
+          <a:xfrm>
+            <a:off x="6199632" y="3346704"/>
+            <a:ext cx="2615184" cy="1371600"/>
+          </a:xfrm>
+          <a:prstGeom prst="roundRect">
+            <a:avLst>
+              <a:gd name="adj" fmla="val 6000"/>
+            </a:avLst>
+          </a:prstGeom>
+          <a:solidFill>
+            <a:srgbClr val="FFFFFF"/>
+          </a:solidFill>
+          <a:ln w="12700">
+            <a:solidFill>
+              <a:srgbClr val="EEF2F7"/>
+            </a:solidFill>
+          </a:ln>
+          <a:effectLst/>
+        </p:spPr>
+        <p:style>
+          <a:lnRef idx="1">
+            <a:schemeClr val="accent1"/>
+          </a:lnRef>
+          <a:fillRef idx="3">
+            <a:schemeClr val="accent1"/>
+          </a:fillRef>
+          <a:effectRef idx="2">
+            <a:schemeClr val="accent1"/>
+          </a:effectRef>
+          <a:fontRef idx="minor">
+            <a:schemeClr val="lt1"/>
+          </a:fontRef>
+        </p:style>
+        <p:txBody>
+          <a:bodyPr rtlCol="0" anchor="ctr"/>
+          <a:lstStyle/>
+          <a:p>
+            <a:pPr algn="ctr"/>
+          </a:p>
+        </p:txBody>
+      </p:sp>
+      <p:sp>
+        <p:nvSpPr>
+          <p:cNvPr id="39" name="Rectangle 38"/>
+          <p:cNvSpPr/>
+          <p:nvPr/>
+        </p:nvSpPr>
+        <p:spPr>
+          <a:xfrm>
+            <a:off x="6199632" y="3346704"/>
+            <a:ext cx="2615184" cy="82296"/>
+          </a:xfrm>
+          <a:prstGeom prst="rect">
+            <a:avLst/>
+          </a:prstGeom>
+          <a:solidFill>
+            <a:srgbClr val="E63946"/>
+          </a:solidFill>
+          <a:ln>
+            <a:noFill/>
+          </a:ln>
+          <a:effectLst/>
+        </p:spPr>
+        <p:style>
+          <a:lnRef idx="1">
+            <a:schemeClr val="accent1"/>
+          </a:lnRef>
+          <a:fillRef idx="3">
+            <a:schemeClr val="accent1"/>
+          </a:fillRef>
+          <a:effectRef idx="2">
+            <a:schemeClr val="accent1"/>
+          </a:effectRef>
+          <a:fontRef idx="minor">
+            <a:schemeClr val="lt1"/>
+          </a:fontRef>
+        </p:style>
+        <p:txBody>
+          <a:bodyPr rtlCol="0" anchor="ctr"/>
+          <a:lstStyle/>
+          <a:p>
+            <a:pPr algn="ctr"/>
+          </a:p>
+        </p:txBody>
+      </p:sp>
+      <p:sp>
+        <p:nvSpPr>
+          <p:cNvPr id="40" name="TextBox 39"/>
+          <p:cNvSpPr txBox="1"/>
+          <p:nvPr/>
+        </p:nvSpPr>
+        <p:spPr>
+          <a:xfrm>
+            <a:off x="6309360" y="3547872"/>
+            <a:ext cx="2395728" cy="502920"/>
+          </a:xfrm>
+          <a:prstGeom prst="rect">
+            <a:avLst/>
+          </a:prstGeom>
+          <a:noFill/>
+        </p:spPr>
+        <p:txBody>
+          <a:bodyPr wrap="square" anchor="t">
+            <a:spAutoFit/>
+          </a:bodyPr>
+          <a:lstStyle/>
+          <a:p>
+            <a:pPr algn="ctr"/>
+            <a:r>
+              <a:rPr sz="2600" b="1" i="0">
+                <a:solidFill>
+                  <a:srgbClr val="E63946"/>
+                </a:solidFill>
+                <a:latin typeface="Calibri"/>
+              </a:rPr>
+              <a:t>€186M</a:t>
+            </a:r>
+          </a:p>
+        </p:txBody>
+      </p:sp>
+      <p:sp>
+        <p:nvSpPr>
+          <p:cNvPr id="41" name="TextBox 40"/>
+          <p:cNvSpPr txBox="1"/>
+          <p:nvPr/>
+        </p:nvSpPr>
+        <p:spPr>
+          <a:xfrm>
+            <a:off x="6291072" y="4059936"/>
+            <a:ext cx="2432303" cy="274320"/>
+          </a:xfrm>
+          <a:prstGeom prst="rect">
+            <a:avLst/>
+          </a:prstGeom>
+          <a:noFill/>
+        </p:spPr>
+        <p:txBody>
+          <a:bodyPr wrap="square" anchor="t">
+            <a:spAutoFit/>
+          </a:bodyPr>
+          <a:lstStyle/>
+          <a:p>
+            <a:pPr algn="ctr"/>
+            <a:r>
+              <a:rPr sz="1050" b="1" i="0">
+                <a:solidFill>
+                  <a:srgbClr val="1F3A5F"/>
+                </a:solidFill>
+                <a:latin typeface="Calibri"/>
+              </a:rPr>
+              <a:t>DEPOSITS AT RISK</a:t>
+            </a:r>
+          </a:p>
+        </p:txBody>
+      </p:sp>
+      <p:sp>
+        <p:nvSpPr>
+          <p:cNvPr id="42" name="TextBox 41"/>
+          <p:cNvSpPr txBox="1"/>
+          <p:nvPr/>
+        </p:nvSpPr>
+        <p:spPr>
+          <a:xfrm>
+            <a:off x="6291072" y="4315968"/>
+            <a:ext cx="2432303" cy="365760"/>
+          </a:xfrm>
+          <a:prstGeom prst="rect">
+            <a:avLst/>
+          </a:prstGeom>
+          <a:noFill/>
+        </p:spPr>
+        <p:txBody>
+          <a:bodyPr wrap="square" anchor="t">
+            <a:spAutoFit/>
+          </a:bodyPr>
+          <a:lstStyle/>
+          <a:p>
+            <a:pPr algn="ctr"/>
+            <a:r>
+              <a:rPr sz="900" b="0" i="0">
+                <a:solidFill>
+                  <a:srgbClr val="8D99AE"/>
+                </a:solidFill>
+                <a:latin typeface="Calibri"/>
+              </a:rPr>
+              <a:t>24% of the book</a:t>
+            </a:r>
+          </a:p>
+        </p:txBody>
+      </p:sp>
+      <p:sp>
+        <p:nvSpPr>
+          <p:cNvPr id="43" name="Rounded Rectangle 42"/>
+          <p:cNvSpPr/>
+          <p:nvPr/>
+        </p:nvSpPr>
+        <p:spPr>
+          <a:xfrm>
+            <a:off x="9015984" y="3346704"/>
+            <a:ext cx="2615184" cy="1371600"/>
+          </a:xfrm>
+          <a:prstGeom prst="roundRect">
+            <a:avLst>
+              <a:gd name="adj" fmla="val 6000"/>
+            </a:avLst>
+          </a:prstGeom>
+          <a:solidFill>
+            <a:srgbClr val="FFFFFF"/>
+          </a:solidFill>
+          <a:ln w="12700">
+            <a:solidFill>
+              <a:srgbClr val="EEF2F7"/>
+            </a:solidFill>
+          </a:ln>
+          <a:effectLst/>
+        </p:spPr>
+        <p:style>
+          <a:lnRef idx="1">
+            <a:schemeClr val="accent1"/>
+          </a:lnRef>
+          <a:fillRef idx="3">
+            <a:schemeClr val="accent1"/>
+          </a:fillRef>
+          <a:effectRef idx="2">
+            <a:schemeClr val="accent1"/>
+          </a:effectRef>
+          <a:fontRef idx="minor">
+            <a:schemeClr val="lt1"/>
+          </a:fontRef>
+        </p:style>
+        <p:txBody>
+          <a:bodyPr rtlCol="0" anchor="ctr"/>
+          <a:lstStyle/>
+          <a:p>
+            <a:pPr algn="ctr"/>
+          </a:p>
+        </p:txBody>
+      </p:sp>
+      <p:sp>
+        <p:nvSpPr>
+          <p:cNvPr id="44" name="Rectangle 43"/>
+          <p:cNvSpPr/>
+          <p:nvPr/>
+        </p:nvSpPr>
+        <p:spPr>
+          <a:xfrm>
+            <a:off x="9015984" y="3346704"/>
+            <a:ext cx="2615184" cy="82296"/>
+          </a:xfrm>
+          <a:prstGeom prst="rect">
+            <a:avLst/>
+          </a:prstGeom>
+          <a:solidFill>
+            <a:srgbClr val="E63946"/>
+          </a:solidFill>
+          <a:ln>
+            <a:noFill/>
+          </a:ln>
+          <a:effectLst/>
+        </p:spPr>
+        <p:style>
+          <a:lnRef idx="1">
+            <a:schemeClr val="accent1"/>
+          </a:lnRef>
+          <a:fillRef idx="3">
+            <a:schemeClr val="accent1"/>
+          </a:fillRef>
+          <a:effectRef idx="2">
+            <a:schemeClr val="accent1"/>
+          </a:effectRef>
+          <a:fontRef idx="minor">
+            <a:schemeClr val="lt1"/>
+          </a:fontRef>
+        </p:style>
+        <p:txBody>
+          <a:bodyPr rtlCol="0" anchor="ctr"/>
+          <a:lstStyle/>
+          <a:p>
+            <a:pPr algn="ctr"/>
+          </a:p>
+        </p:txBody>
+      </p:sp>
+      <p:sp>
+        <p:nvSpPr>
+          <p:cNvPr id="45" name="TextBox 44"/>
+          <p:cNvSpPr txBox="1"/>
+          <p:nvPr/>
+        </p:nvSpPr>
+        <p:spPr>
+          <a:xfrm>
+            <a:off x="9125711" y="3547872"/>
+            <a:ext cx="2395728" cy="502920"/>
+          </a:xfrm>
+          <a:prstGeom prst="rect">
+            <a:avLst/>
+          </a:prstGeom>
+          <a:noFill/>
+        </p:spPr>
+        <p:txBody>
+          <a:bodyPr wrap="square" anchor="t">
+            <a:spAutoFit/>
+          </a:bodyPr>
+          <a:lstStyle/>
+          <a:p>
+            <a:pPr algn="ctr"/>
+            <a:r>
+              <a:rPr sz="2600" b="1" i="0">
+                <a:solidFill>
+                  <a:srgbClr val="E63946"/>
+                </a:solidFill>
+                <a:latin typeface="Calibri"/>
+              </a:rPr>
+              <a:t>≈€4.6M</a:t>
+            </a:r>
+          </a:p>
+        </p:txBody>
+      </p:sp>
+      <p:sp>
+        <p:nvSpPr>
+          <p:cNvPr id="46" name="TextBox 45"/>
+          <p:cNvSpPr txBox="1"/>
+          <p:nvPr/>
+        </p:nvSpPr>
+        <p:spPr>
+          <a:xfrm>
+            <a:off x="9107424" y="4059936"/>
+            <a:ext cx="2432303" cy="274320"/>
+          </a:xfrm>
+          <a:prstGeom prst="rect">
+            <a:avLst/>
+          </a:prstGeom>
+          <a:noFill/>
+        </p:spPr>
+        <p:txBody>
+          <a:bodyPr wrap="square" anchor="t">
+            <a:spAutoFit/>
+          </a:bodyPr>
+          <a:lstStyle/>
+          <a:p>
+            <a:pPr algn="ctr"/>
+            <a:r>
+              <a:rPr sz="1050" b="1" i="0">
+                <a:solidFill>
+                  <a:srgbClr val="1F3A5F"/>
+                </a:solidFill>
+                <a:latin typeface="Calibri"/>
+              </a:rPr>
+              <a:t>REVENUE AT RISK / YR</a:t>
+            </a:r>
+          </a:p>
+        </p:txBody>
+      </p:sp>
+      <p:sp>
+        <p:nvSpPr>
+          <p:cNvPr id="47" name="TextBox 46"/>
+          <p:cNvSpPr txBox="1"/>
+          <p:nvPr/>
+        </p:nvSpPr>
+        <p:spPr>
+          <a:xfrm>
+            <a:off x="9107424" y="4315968"/>
+            <a:ext cx="2432303" cy="365760"/>
+          </a:xfrm>
+          <a:prstGeom prst="rect">
+            <a:avLst/>
+          </a:prstGeom>
+          <a:noFill/>
+        </p:spPr>
+        <p:txBody>
+          <a:bodyPr wrap="square" anchor="t">
+            <a:spAutoFit/>
+          </a:bodyPr>
+          <a:lstStyle/>
+          <a:p>
+            <a:pPr algn="ctr"/>
+            <a:r>
+              <a:rPr sz="900" b="0" i="0">
+                <a:solidFill>
+                  <a:srgbClr val="8D99AE"/>
+                </a:solidFill>
+                <a:latin typeface="Calibri"/>
+              </a:rPr>
+              <a:t>~2.5% NIM (illustrative)</a:t>
+            </a:r>
+          </a:p>
+        </p:txBody>
+      </p:sp>
+      <p:sp>
+        <p:nvSpPr>
+          <p:cNvPr id="48" name="Rounded Rectangle 47"/>
+          <p:cNvSpPr/>
+          <p:nvPr/>
+        </p:nvSpPr>
+        <p:spPr>
+          <a:xfrm>
+            <a:off x="566928" y="5029200"/>
+            <a:ext cx="11064240" cy="1143000"/>
+          </a:xfrm>
+          <a:prstGeom prst="roundRect">
+            <a:avLst>
+              <a:gd name="adj" fmla="val 6000"/>
+            </a:avLst>
+          </a:prstGeom>
+          <a:solidFill>
+            <a:srgbClr val="EEF2F7"/>
+          </a:solidFill>
+          <a:ln>
+            <a:noFill/>
+          </a:ln>
+          <a:effectLst/>
+        </p:spPr>
+        <p:style>
+          <a:lnRef idx="1">
+            <a:schemeClr val="accent1"/>
+          </a:lnRef>
+          <a:fillRef idx="3">
+            <a:schemeClr val="accent1"/>
+          </a:fillRef>
+          <a:effectRef idx="2">
+            <a:schemeClr val="accent1"/>
+          </a:effectRef>
+          <a:fontRef idx="minor">
+            <a:schemeClr val="lt1"/>
+          </a:fontRef>
+        </p:style>
+        <p:txBody>
+          <a:bodyPr rtlCol="0" anchor="ctr"/>
+          <a:lstStyle/>
+          <a:p>
+            <a:pPr algn="ctr"/>
+          </a:p>
+        </p:txBody>
+      </p:sp>
+      <p:sp>
+        <p:nvSpPr>
+          <p:cNvPr id="49" name="TextBox 48"/>
+          <p:cNvSpPr txBox="1"/>
+          <p:nvPr/>
+        </p:nvSpPr>
+        <p:spPr>
+          <a:xfrm>
+            <a:off x="822960" y="5120640"/>
+            <a:ext cx="10515600" cy="987552"/>
+          </a:xfrm>
+          <a:prstGeom prst="rect">
+            <a:avLst/>
+          </a:prstGeom>
+          <a:noFill/>
+        </p:spPr>
+        <p:txBody>
+          <a:bodyPr wrap="square" anchor="ctr">
+            <a:spAutoFit/>
+          </a:bodyPr>
+          <a:lstStyle/>
+          <a:p>
             <a:pPr algn="l"/>
             <a:r>
-              <a:rPr sz="1600" b="1" i="0">
+              <a:rPr sz="1350" b="1" i="0">
                 <a:solidFill>
                   <a:srgbClr val="1F3A5F"/>
                 </a:solidFill>
                 <a:latin typeface="Calibri"/>
               </a:rPr>
-              <a:t>Thought process</a:t>
-            </a:r>
-          </a:p>
-        </p:txBody>
-      </p:sp>
-      <p:sp>
-        <p:nvSpPr>
-          <p:cNvPr id="32" name="TextBox 31"/>
-          <p:cNvSpPr txBox="1"/>
-          <p:nvPr/>
-        </p:nvSpPr>
-        <p:spPr>
-          <a:xfrm>
-            <a:off x="566928" y="3794760"/>
-            <a:ext cx="11064240" cy="2377440"/>
-          </a:xfrm>
-          <a:prstGeom prst="rect">
-            <a:avLst/>
-          </a:prstGeom>
-          <a:noFill/>
-        </p:spPr>
-        <p:txBody>
-          <a:bodyPr wrap="square" anchor="t">
-            <a:spAutoFit/>
-          </a:bodyPr>
-          <a:lstStyle/>
-          <a:p>
-            <a:pPr algn="l">
-              <a:lnSpc>
-                <a:spcPct val="108000"/>
-              </a:lnSpc>
-              <a:spcAft>
-                <a:spcPts val="900"/>
-              </a:spcAft>
+              <a:t>Why these:  </a:t>
+            </a:r>
+            <a:r>
+              <a:rPr sz="1350" b="0" i="0">
+                <a:solidFill>
+                  <a:srgbClr val="2B2B2B"/>
+                </a:solidFill>
+                <a:latin typeface="Calibri"/>
+              </a:rPr>
+              <a:t>churn is the north-star; balance- and revenue-at-risk put it in euros; engagement and cross-sell are the levers we can pull. Success = churn ≤ 15% and retention ≥ 85% within a year.</a:t>
+            </a:r>
+          </a:p>
+          <a:p>
+            <a:pPr>
+              <a:spcBef>
+                <a:spcPts val="400"/>
+              </a:spcBef>
             </a:pPr>
             <a:r>
-              <a:rPr sz="1450" b="1" i="0">
-                <a:solidFill>
-                  <a:srgbClr val="2A9D8F"/>
-                </a:solidFill>
-                <a:latin typeface="Calibri"/>
-              </a:rPr>
-              <a:t>▸ </a:t>
-            </a:r>
-            <a:r>
-              <a:rPr sz="1450" b="1" i="0">
-                <a:solidFill>
-                  <a:srgbClr val="1F3A5F"/>
-                </a:solidFill>
-                <a:latin typeface="Calibri"/>
-              </a:rPr>
-              <a:t>Churn rate is the north-star metric </a:t>
-            </a:r>
-            <a:r>
-              <a:rPr sz="1450" b="0" i="0">
-                <a:solidFill>
-                  <a:srgbClr val="2B2B2B"/>
-                </a:solidFill>
-                <a:latin typeface="Calibri"/>
-              </a:rPr>
-              <a:t>— the single number that tells us whether we are winning or losing customers.</a:t>
-            </a:r>
-          </a:p>
-          <a:p>
-            <a:pPr>
-              <a:lnSpc>
-                <a:spcPct val="108000"/>
-              </a:lnSpc>
-              <a:spcAft>
-                <a:spcPts val="900"/>
-              </a:spcAft>
-            </a:pPr>
-            <a:r>
-              <a:rPr sz="1450" b="1" i="0">
-                <a:solidFill>
-                  <a:srgbClr val="2A9D8F"/>
-                </a:solidFill>
-                <a:latin typeface="Calibri"/>
-              </a:rPr>
-              <a:t>▸ </a:t>
-            </a:r>
-            <a:r>
-              <a:rPr sz="1450" b="1" i="0">
-                <a:solidFill>
-                  <a:srgbClr val="1F3A5F"/>
-                </a:solidFill>
-                <a:latin typeface="Calibri"/>
-              </a:rPr>
-              <a:t>Balance at risk</a:t>
-            </a:r>
-            <a:r>
-              <a:rPr sz="1450" b="0" i="0">
-                <a:solidFill>
-                  <a:srgbClr val="2B2B2B"/>
-                </a:solidFill>
-                <a:latin typeface="Calibri"/>
-              </a:rPr>
-              <a:t> translates churn into euros, so the business feels the impact (€186M ≈ a quarter of all deposits).</a:t>
-            </a:r>
-          </a:p>
-          <a:p>
-            <a:pPr>
-              <a:lnSpc>
-                <a:spcPct val="108000"/>
-              </a:lnSpc>
-              <a:spcAft>
-                <a:spcPts val="900"/>
-              </a:spcAft>
-            </a:pPr>
-            <a:r>
-              <a:rPr sz="1450" b="1" i="0">
-                <a:solidFill>
-                  <a:srgbClr val="2A9D8F"/>
-                </a:solidFill>
-                <a:latin typeface="Calibri"/>
-              </a:rPr>
-              <a:t>▸ </a:t>
-            </a:r>
-            <a:r>
-              <a:rPr sz="1450" b="1" i="0">
-                <a:solidFill>
-                  <a:srgbClr val="1F3A5F"/>
-                </a:solidFill>
-                <a:latin typeface="Calibri"/>
-              </a:rPr>
-              <a:t>Active-member rate &amp; products-per-customer</a:t>
-            </a:r>
-            <a:r>
-              <a:rPr sz="1450" b="0" i="0">
-                <a:solidFill>
-                  <a:srgbClr val="2B2B2B"/>
-                </a:solidFill>
-                <a:latin typeface="Calibri"/>
-              </a:rPr>
-              <a:t> are the levers we can actually pull — engagement and product fit drive retention.</a:t>
-            </a:r>
-          </a:p>
-          <a:p>
-            <a:pPr>
-              <a:lnSpc>
-                <a:spcPct val="108000"/>
-              </a:lnSpc>
-              <a:spcAft>
-                <a:spcPts val="900"/>
-              </a:spcAft>
-            </a:pPr>
-            <a:r>
-              <a:rPr sz="1450" b="1" i="0">
-                <a:solidFill>
-                  <a:srgbClr val="2A9D8F"/>
-                </a:solidFill>
-                <a:latin typeface="Calibri"/>
-              </a:rPr>
-              <a:t>▸ </a:t>
-            </a:r>
-            <a:r>
-              <a:rPr sz="1450" b="1" i="0">
-                <a:solidFill>
-                  <a:srgbClr val="1F3A5F"/>
-                </a:solidFill>
-                <a:latin typeface="Calibri"/>
-              </a:rPr>
-              <a:t>Success</a:t>
-            </a:r>
-            <a:r>
-              <a:rPr sz="1450" b="0" i="0">
-                <a:solidFill>
-                  <a:srgbClr val="2B2B2B"/>
-                </a:solidFill>
-                <a:latin typeface="Calibri"/>
-              </a:rPr>
-              <a:t> = move churn from 20% → ≤15% and lift retention above 85% over the next year.</a:t>
-            </a:r>
-          </a:p>
-        </p:txBody>
-      </p:sp>
-      <p:sp>
-        <p:nvSpPr>
-          <p:cNvPr id="33" name="TextBox 32"/>
+              <a:rPr sz="1100" b="0" i="1">
+                <a:solidFill>
+                  <a:srgbClr val="8D99AE"/>
+                </a:solidFill>
+                <a:latin typeface="Calibri"/>
+              </a:rPr>
+              <a:t>Revenue figures assume a 2.5% net-interest margin on deposits — illustrative, as the dataset has no revenue field.</a:t>
+            </a:r>
+          </a:p>
+        </p:txBody>
+      </p:sp>
+      <p:sp>
+        <p:nvSpPr>
+          <p:cNvPr id="50" name="TextBox 49"/>
           <p:cNvSpPr txBox="1"/>
           <p:nvPr/>
         </p:nvSpPr>
@@ -8385,7 +8946,7 @@
       </p:sp>
       <p:sp>
         <p:nvSpPr>
-          <p:cNvPr id="34" name="TextBox 33"/>
+          <p:cNvPr id="51" name="TextBox 50"/>
           <p:cNvSpPr txBox="1"/>
           <p:nvPr/>
         </p:nvSpPr>
